--- a/презентация.pptx
+++ b/презентация.pptx
@@ -2092,7 +2092,7 @@
           </a:prstGeom>
           <a:extLst>
             <a:ext uri="{C572A759-6A51-4108-AA02-DFA0A04FC94B}">
-              <ma14:wrappingTextBoxFlag xmlns:ma14="http://schemas.microsoft.com/office/mac/drawingml/2011/main" xmlns="" val="0"/>
+              <ma14:wrappingTextBoxFlag xmlns="" xmlns:ma14="http://schemas.microsoft.com/office/mac/drawingml/2011/main" val="0"/>
             </a:ext>
           </a:extLst>
         </p:spPr>
@@ -2173,7 +2173,7 @@
           </a:prstGeom>
           <a:extLst>
             <a:ext uri="{C572A759-6A51-4108-AA02-DFA0A04FC94B}">
-              <ma14:wrappingTextBoxFlag xmlns:ma14="http://schemas.microsoft.com/office/mac/drawingml/2011/main" xmlns="" val="0"/>
+              <ma14:wrappingTextBoxFlag xmlns="" xmlns:ma14="http://schemas.microsoft.com/office/mac/drawingml/2011/main" val="0"/>
             </a:ext>
           </a:extLst>
         </p:spPr>
@@ -2251,7 +2251,7 @@
           </a:prstGeom>
           <a:extLst>
             <a:ext uri="{C572A759-6A51-4108-AA02-DFA0A04FC94B}">
-              <ma14:wrappingTextBoxFlag xmlns:ma14="http://schemas.microsoft.com/office/mac/drawingml/2011/main" xmlns="" val="0"/>
+              <ma14:wrappingTextBoxFlag xmlns="" xmlns:ma14="http://schemas.microsoft.com/office/mac/drawingml/2011/main" val="0"/>
             </a:ext>
           </a:extLst>
         </p:spPr>
@@ -3021,7 +3021,7 @@
           <a:noFill/>
         </p:spPr>
         <p:txBody>
-          <a:bodyPr wrap="square" lIns="0" rIns="0" tIns="0" bIns="0">
+          <a:bodyPr wrap="square" lIns="0" tIns="0" rIns="0" bIns="0">
             <a:spAutoFit/>
           </a:bodyPr>
           <a:lstStyle/>
@@ -3055,7 +3055,7 @@
           <a:noFill/>
         </p:spPr>
         <p:txBody>
-          <a:bodyPr wrap="square" lIns="0" rIns="0" tIns="0" bIns="0">
+          <a:bodyPr wrap="square" lIns="0" tIns="0" rIns="0" bIns="0">
             <a:spAutoFit/>
           </a:bodyPr>
           <a:lstStyle/>
@@ -3089,7 +3089,7 @@
           <a:noFill/>
         </p:spPr>
         <p:txBody>
-          <a:bodyPr wrap="square" lIns="0" rIns="0" tIns="0" bIns="0">
+          <a:bodyPr wrap="square" lIns="0" tIns="0" rIns="0" bIns="0">
             <a:spAutoFit/>
           </a:bodyPr>
           <a:lstStyle/>
@@ -3123,7 +3123,7 @@
           <a:noFill/>
         </p:spPr>
         <p:txBody>
-          <a:bodyPr wrap="square" lIns="0" rIns="0" tIns="0" bIns="0">
+          <a:bodyPr wrap="square" lIns="0" tIns="0" rIns="0" bIns="0">
             <a:spAutoFit/>
           </a:bodyPr>
           <a:lstStyle/>
@@ -3157,7 +3157,7 @@
           <a:noFill/>
         </p:spPr>
         <p:txBody>
-          <a:bodyPr wrap="square" lIns="0" rIns="0" tIns="0" bIns="0">
+          <a:bodyPr wrap="square" lIns="0" tIns="0" rIns="0" bIns="0">
             <a:spAutoFit/>
           </a:bodyPr>
           <a:lstStyle/>
@@ -3191,7 +3191,7 @@
           <a:noFill/>
         </p:spPr>
         <p:txBody>
-          <a:bodyPr wrap="square" lIns="0" rIns="0" tIns="0" bIns="0">
+          <a:bodyPr wrap="square" lIns="0" tIns="0" rIns="0" bIns="0">
             <a:spAutoFit/>
           </a:bodyPr>
           <a:lstStyle/>
@@ -3225,7 +3225,7 @@
           <a:noFill/>
         </p:spPr>
         <p:txBody>
-          <a:bodyPr wrap="square" lIns="0" rIns="0" tIns="0" bIns="0">
+          <a:bodyPr wrap="square" lIns="0" tIns="0" rIns="0" bIns="0">
             <a:spAutoFit/>
           </a:bodyPr>
           <a:lstStyle/>
@@ -3283,7 +3283,7 @@
           <a:noFill/>
         </p:spPr>
         <p:txBody>
-          <a:bodyPr wrap="square" lIns="0" rIns="0" tIns="0" bIns="0">
+          <a:bodyPr wrap="square" lIns="0" tIns="0" rIns="0" bIns="0">
             <a:spAutoFit/>
           </a:bodyPr>
           <a:lstStyle/>
@@ -3352,7 +3352,7 @@
           <a:noFill/>
         </p:spPr>
         <p:txBody>
-          <a:bodyPr wrap="square" lIns="0" rIns="0" tIns="0" bIns="0">
+          <a:bodyPr wrap="square" lIns="0" tIns="0" rIns="0" bIns="0">
             <a:spAutoFit/>
           </a:bodyPr>
           <a:lstStyle/>
@@ -3410,7 +3410,7 @@
           <a:noFill/>
         </p:spPr>
         <p:txBody>
-          <a:bodyPr wrap="square" lIns="0" rIns="0" tIns="0" bIns="0">
+          <a:bodyPr wrap="square" lIns="0" tIns="0" rIns="0" bIns="0">
             <a:spAutoFit/>
           </a:bodyPr>
           <a:lstStyle/>
@@ -3468,7 +3468,7 @@
           <a:noFill/>
         </p:spPr>
         <p:txBody>
-          <a:bodyPr wrap="square" lIns="0" rIns="0" tIns="0" bIns="0">
+          <a:bodyPr wrap="square" lIns="0" tIns="0" rIns="0" bIns="0">
             <a:spAutoFit/>
           </a:bodyPr>
           <a:lstStyle/>
@@ -3526,7 +3526,7 @@
           <a:noFill/>
         </p:spPr>
         <p:txBody>
-          <a:bodyPr wrap="square" lIns="0" rIns="0" tIns="0" bIns="0">
+          <a:bodyPr wrap="square" lIns="0" tIns="0" rIns="0" bIns="0">
             <a:spAutoFit/>
           </a:bodyPr>
           <a:lstStyle/>
@@ -3595,7 +3595,7 @@
           <a:noFill/>
         </p:spPr>
         <p:txBody>
-          <a:bodyPr wrap="square" lIns="0" rIns="0" tIns="0" bIns="0">
+          <a:bodyPr wrap="square" lIns="0" tIns="0" rIns="0" bIns="0">
             <a:spAutoFit/>
           </a:bodyPr>
           <a:lstStyle/>
@@ -3664,7 +3664,7 @@
           <a:noFill/>
         </p:spPr>
         <p:txBody>
-          <a:bodyPr wrap="square" lIns="0" rIns="0" tIns="0" bIns="0">
+          <a:bodyPr wrap="square" lIns="0" tIns="0" rIns="0" bIns="0">
             <a:spAutoFit/>
           </a:bodyPr>
           <a:lstStyle/>
@@ -3937,7 +3937,7 @@
           <p:nvPr/>
         </p:nvPicPr>
         <p:blipFill>
-          <a:blip r:embed="rId4"/>
+          <a:blip r:embed="rId3"/>
           <a:stretch>
             <a:fillRect/>
           </a:stretch>
@@ -4099,7 +4099,7 @@
           <p:nvPr/>
         </p:nvPicPr>
         <p:blipFill>
-          <a:blip r:embed="rId4"/>
+          <a:blip r:embed="rId3"/>
           <a:stretch>
             <a:fillRect/>
           </a:stretch>
@@ -4288,7 +4288,7 @@
           <p:nvPr/>
         </p:nvPicPr>
         <p:blipFill>
-          <a:blip r:embed="rId4"/>
+          <a:blip r:embed="rId3"/>
           <a:stretch>
             <a:fillRect/>
           </a:stretch>
@@ -5878,14 +5878,14 @@
           <p:nvPr>
             <p:extLst>
               <p:ext uri="{D42A27DB-BD31-4B8C-83A1-F6EECF244321}">
-                <p14:modId xmlns:p14="http://schemas.microsoft.com/office/powerpoint/2010/main" val="74127173"/>
+                <p14:modId xmlns:p14="http://schemas.microsoft.com/office/powerpoint/2010/main" val="3526419910"/>
               </p:ext>
             </p:extLst>
           </p:nvPr>
         </p:nvGraphicFramePr>
         <p:xfrm>
           <a:off x="534295" y="1453313"/>
-          <a:ext cx="11261464" cy="4648463"/>
+          <a:ext cx="11261464" cy="5311813"/>
         </p:xfrm>
         <a:graphic>
           <a:graphicData uri="http://schemas.openxmlformats.org/drawingml/2006/table">
@@ -6028,7 +6028,7 @@
                   </a:ext>
                 </a:extLst>
               </a:tr>
-              <a:tr h="833330">
+              <a:tr h="690000">
                 <a:tc>
                   <a:txBody>
                     <a:bodyPr/>
@@ -6036,7 +6036,7 @@
                     <a:p>
                       <a:pPr algn="l"/>
                       <a:r>
-                        <a:rPr sz="1500">
+                        <a:rPr sz="1400">
                           <a:solidFill>
                             <a:srgbClr val="141414"/>
                           </a:solidFill>
@@ -6095,13 +6095,13 @@
                     <a:p>
                       <a:pPr algn="l"/>
                       <a:r>
-                        <a:rPr sz="1400">
+                        <a:rPr sz="1200">
                           <a:solidFill>
                             <a:srgbClr val="141414"/>
                           </a:solidFill>
                           <a:latin typeface="VTB Group UI Book" panose="020B0503040504020204" pitchFamily="34" charset="-52"/>
                         </a:rPr>
-                        <a:t>Переключатель «Доска» в Оповещаторе. По кнопке «Оповестить» доска создаётся вместе с ВКС и привязывается к комнате DION</a:t>
+                        <a:t>Переключатель «Доска» в блоке быстрого набора Оповещатора. Включает дежурный; по кнопке «Оповестить» доска создаётся вместе с ВКС и привязывается к конференции</a:t>
                       </a:r>
                       <a:endParaRPr lang="ru-RU">
                         <a:latin typeface="VTB Group UI Book" panose="020B0503040504020204" pitchFamily="34" charset="-52"/>
@@ -6153,66 +6153,7 @@
                   </a:ext>
                 </a:extLst>
               </a:tr>
-              <a:tr h="833330">
-                <a:tc>
-                  <a:txBody>
-                    <a:bodyPr/>
-                    <a:lstStyle/>
-                    <a:p>
-                      <a:pPr algn="l"/>
-                      <a:r>
-                        <a:rPr sz="1500">
-                          <a:solidFill>
-                            <a:srgbClr val="141414"/>
-                          </a:solidFill>
-                          <a:latin typeface="VTB Group UI Book" panose="020B0503040504020204" pitchFamily="34" charset="-52"/>
-                        </a:rPr>
-                        <a:t>Ссылка в оповещении</a:t>
-                      </a:r>
-                      <a:endParaRPr lang="ru-RU">
-                        <a:latin typeface="VTB Group UI Book" panose="020B0503040504020204" pitchFamily="34" charset="-52"/>
-                      </a:endParaRPr>
-                    </a:p>
-                  </a:txBody>
-                  <a:tcPr marL="182880" marR="182880" anchor="ctr">
-                    <a:lnL w="12700" cap="flat" cmpd="sng" algn="ctr">
-                      <a:solidFill>
-                        <a:schemeClr val="tx1"/>
-                      </a:solidFill>
-                      <a:prstDash val="solid"/>
-                      <a:round/>
-                      <a:headEnd type="none" w="med" len="med"/>
-                      <a:tailEnd type="none" w="med" len="med"/>
-                    </a:lnL>
-                    <a:lnR w="12700" cap="flat" cmpd="sng" algn="ctr">
-                      <a:solidFill>
-                        <a:schemeClr val="tx1"/>
-                      </a:solidFill>
-                      <a:prstDash val="solid"/>
-                      <a:round/>
-                      <a:headEnd type="none" w="med" len="med"/>
-                      <a:tailEnd type="none" w="med" len="med"/>
-                    </a:lnR>
-                    <a:lnT w="12700" cap="flat" cmpd="sng" algn="ctr">
-                      <a:solidFill>
-                        <a:schemeClr val="tx1"/>
-                      </a:solidFill>
-                      <a:prstDash val="solid"/>
-                      <a:round/>
-                      <a:headEnd type="none" w="med" len="med"/>
-                      <a:tailEnd type="none" w="med" len="med"/>
-                    </a:lnT>
-                    <a:lnB w="12700" cap="flat" cmpd="sng" algn="ctr">
-                      <a:solidFill>
-                        <a:schemeClr val="tx1"/>
-                      </a:solidFill>
-                      <a:prstDash val="solid"/>
-                      <a:round/>
-                      <a:headEnd type="none" w="med" len="med"/>
-                      <a:tailEnd type="none" w="med" len="med"/>
-                    </a:lnB>
-                  </a:tcPr>
-                </a:tc>
+              <a:tr h="690000">
                 <a:tc>
                   <a:txBody>
                     <a:bodyPr/>
@@ -6226,7 +6167,7 @@
                           </a:solidFill>
                           <a:latin typeface="VTB Group UI Book" panose="020B0503040504020204" pitchFamily="34" charset="-52"/>
                         </a:rPr>
-                        <a:t>Ссылка на доску видна в предпросмотре и уходит участникам в одном сообщении со ссылкой на ВКС</a:t>
+                        <a:t>Ссылка на доску</a:t>
                       </a:r>
                       <a:endParaRPr lang="ru-RU">
                         <a:latin typeface="VTB Group UI Book" panose="020B0503040504020204" pitchFamily="34" charset="-52"/>
@@ -6272,13 +6213,6 @@
                     </a:lnB>
                   </a:tcPr>
                 </a:tc>
-                <a:extLst>
-                  <a:ext uri="{0D108BD9-81ED-4DB2-BD59-A6C34878D82A}">
-                    <a16:rowId xmlns:a16="http://schemas.microsoft.com/office/drawing/2014/main" val="1610479619"/>
-                  </a:ext>
-                </a:extLst>
-              </a:tr>
-              <a:tr h="833330">
                 <a:tc>
                   <a:txBody>
                     <a:bodyPr/>
@@ -6286,13 +6220,34 @@
                     <a:p>
                       <a:pPr algn="l"/>
                       <a:r>
-                        <a:rPr sz="1500">
+                        <a:rPr sz="1200">
                           <a:solidFill>
                             <a:srgbClr val="141414"/>
                           </a:solidFill>
                           <a:latin typeface="VTB Group UI Book" panose="020B0503040504020204" pitchFamily="34" charset="-52"/>
                         </a:rPr>
-                        <a:t>Контекст аварии на доске</a:t>
+                        <a:t>Ссылка уходит участникам в одном сообщении со ссылкой на ВКС и </a:t>
+                      </a:r>
+                      <a:r>
+                        <a:rPr sz="1200">
+                          <a:solidFill>
+                            <a:srgbClr val="141414"/>
+                          </a:solidFill>
+                          <a:highlight>
+                            <a:srgbClr val="FF0000"/>
+                          </a:highlight>
+                          <a:latin typeface="VTB Group UI Book" panose="020B0503040504020204" pitchFamily="34" charset="-52"/>
+                        </a:rPr>
+                        <a:t>видна в предпросмотре</a:t>
+                      </a:r>
+                      <a:r>
+                        <a:rPr sz="1200">
+                          <a:solidFill>
+                            <a:srgbClr val="141414"/>
+                          </a:solidFill>
+                          <a:latin typeface="VTB Group UI Book" panose="020B0503040504020204" pitchFamily="34" charset="-52"/>
+                        </a:rPr>
+                        <a:t>. Доску можно повторно открыть из карточки аварии</a:t>
                       </a:r>
                       <a:endParaRPr lang="ru-RU">
                         <a:latin typeface="VTB Group UI Book" panose="020B0503040504020204" pitchFamily="34" charset="-52"/>
@@ -6338,6 +6293,13 @@
                     </a:lnB>
                   </a:tcPr>
                 </a:tc>
+                <a:extLst>
+                  <a:ext uri="{0D108BD9-81ED-4DB2-BD59-A6C34878D82A}">
+                    <a16:rowId xmlns:a16="http://schemas.microsoft.com/office/drawing/2014/main" val="4242541928"/>
+                  </a:ext>
+                </a:extLst>
+              </a:tr>
+              <a:tr h="690000">
                 <a:tc>
                   <a:txBody>
                     <a:bodyPr/>
@@ -6351,7 +6313,7 @@
                           </a:solidFill>
                           <a:latin typeface="VTB Group UI Book" panose="020B0503040504020204" pitchFamily="34" charset="-52"/>
                         </a:rPr>
-                        <a:t>Доска заполняется по шаблону: ID аварии, система, КЕ, критичность, точка сбоя, связанные сервисы, ID ВКС</a:t>
+                        <a:t>Контекст аварии</a:t>
                       </a:r>
                       <a:endParaRPr lang="ru-RU">
                         <a:latin typeface="VTB Group UI Book" panose="020B0503040504020204" pitchFamily="34" charset="-52"/>
@@ -6397,13 +6359,6 @@
                     </a:lnB>
                   </a:tcPr>
                 </a:tc>
-                <a:extLst>
-                  <a:ext uri="{0D108BD9-81ED-4DB2-BD59-A6C34878D82A}">
-                    <a16:rowId xmlns:a16="http://schemas.microsoft.com/office/drawing/2014/main" val="2793033974"/>
-                  </a:ext>
-                </a:extLst>
-              </a:tr>
-              <a:tr h="833330">
                 <a:tc>
                   <a:txBody>
                     <a:bodyPr/>
@@ -6411,7 +6366,344 @@
                     <a:p>
                       <a:pPr algn="l"/>
                       <a:r>
-                        <a:rPr sz="1500">
+                        <a:rPr sz="1200">
+                          <a:solidFill>
+                            <a:srgbClr val="141414"/>
+                          </a:solidFill>
+                          <a:latin typeface="VTB Group UI Book" panose="020B0503040504020204" pitchFamily="34" charset="-52"/>
+                        </a:rPr>
+                        <a:t>Карточка на доске заполняется из Оповещатора: номер аварии, система, КЕ, точка сбоя, связанные сервисы, конференция. Шаблон доски: колонки «Хронология», «Гипотезы», «Действия»</a:t>
+                      </a:r>
+                      <a:endParaRPr lang="ru-RU">
+                        <a:latin typeface="VTB Group UI Book" panose="020B0503040504020204" pitchFamily="34" charset="-52"/>
+                      </a:endParaRPr>
+                    </a:p>
+                  </a:txBody>
+                  <a:tcPr marL="182880" marR="182880" anchor="ctr">
+                    <a:lnL w="12700" cap="flat" cmpd="sng" algn="ctr">
+                      <a:solidFill>
+                        <a:schemeClr val="tx1"/>
+                      </a:solidFill>
+                      <a:prstDash val="solid"/>
+                      <a:round/>
+                      <a:headEnd type="none" w="med" len="med"/>
+                      <a:tailEnd type="none" w="med" len="med"/>
+                    </a:lnL>
+                    <a:lnR w="12700" cap="flat" cmpd="sng" algn="ctr">
+                      <a:solidFill>
+                        <a:schemeClr val="tx1"/>
+                      </a:solidFill>
+                      <a:prstDash val="solid"/>
+                      <a:round/>
+                      <a:headEnd type="none" w="med" len="med"/>
+                      <a:tailEnd type="none" w="med" len="med"/>
+                    </a:lnR>
+                    <a:lnT w="12700" cap="flat" cmpd="sng" algn="ctr">
+                      <a:solidFill>
+                        <a:schemeClr val="tx1"/>
+                      </a:solidFill>
+                      <a:prstDash val="solid"/>
+                      <a:round/>
+                      <a:headEnd type="none" w="med" len="med"/>
+                      <a:tailEnd type="none" w="med" len="med"/>
+                    </a:lnT>
+                    <a:lnB w="12700" cap="flat" cmpd="sng" algn="ctr">
+                      <a:solidFill>
+                        <a:schemeClr val="tx1"/>
+                      </a:solidFill>
+                      <a:prstDash val="solid"/>
+                      <a:round/>
+                      <a:headEnd type="none" w="med" len="med"/>
+                      <a:tailEnd type="none" w="med" len="med"/>
+                    </a:lnB>
+                  </a:tcPr>
+                </a:tc>
+                <a:extLst>
+                  <a:ext uri="{0D108BD9-81ED-4DB2-BD59-A6C34878D82A}">
+                    <a16:rowId xmlns:a16="http://schemas.microsoft.com/office/drawing/2014/main" val="1030925275"/>
+                  </a:ext>
+                </a:extLst>
+              </a:tr>
+              <a:tr h="690000">
+                <a:tc>
+                  <a:txBody>
+                    <a:bodyPr/>
+                    <a:lstStyle/>
+                    <a:p>
+                      <a:pPr algn="l"/>
+                      <a:r>
+                        <a:rPr sz="1400">
+                          <a:solidFill>
+                            <a:srgbClr val="141414"/>
+                          </a:solidFill>
+                          <a:latin typeface="VTB Group UI Book" panose="020B0503040504020204" pitchFamily="34" charset="-52"/>
+                        </a:rPr>
+                        <a:t>Инструменты</a:t>
+                      </a:r>
+                      <a:endParaRPr lang="ru-RU">
+                        <a:latin typeface="VTB Group UI Book" panose="020B0503040504020204" pitchFamily="34" charset="-52"/>
+                      </a:endParaRPr>
+                    </a:p>
+                  </a:txBody>
+                  <a:tcPr marL="182880" marR="182880" anchor="ctr">
+                    <a:lnL w="12700" cap="flat" cmpd="sng" algn="ctr">
+                      <a:solidFill>
+                        <a:schemeClr val="tx1"/>
+                      </a:solidFill>
+                      <a:prstDash val="solid"/>
+                      <a:round/>
+                      <a:headEnd type="none" w="med" len="med"/>
+                      <a:tailEnd type="none" w="med" len="med"/>
+                    </a:lnL>
+                    <a:lnR w="12700" cap="flat" cmpd="sng" algn="ctr">
+                      <a:solidFill>
+                        <a:schemeClr val="tx1"/>
+                      </a:solidFill>
+                      <a:prstDash val="solid"/>
+                      <a:round/>
+                      <a:headEnd type="none" w="med" len="med"/>
+                      <a:tailEnd type="none" w="med" len="med"/>
+                    </a:lnR>
+                    <a:lnT w="12700" cap="flat" cmpd="sng" algn="ctr">
+                      <a:solidFill>
+                        <a:schemeClr val="tx1"/>
+                      </a:solidFill>
+                      <a:prstDash val="solid"/>
+                      <a:round/>
+                      <a:headEnd type="none" w="med" len="med"/>
+                      <a:tailEnd type="none" w="med" len="med"/>
+                    </a:lnT>
+                    <a:lnB w="12700" cap="flat" cmpd="sng" algn="ctr">
+                      <a:solidFill>
+                        <a:schemeClr val="tx1"/>
+                      </a:solidFill>
+                      <a:prstDash val="solid"/>
+                      <a:round/>
+                      <a:headEnd type="none" w="med" len="med"/>
+                      <a:tailEnd type="none" w="med" len="med"/>
+                    </a:lnB>
+                  </a:tcPr>
+                </a:tc>
+                <a:tc>
+                  <a:txBody>
+                    <a:bodyPr/>
+                    <a:lstStyle/>
+                    <a:p>
+                      <a:pPr algn="l"/>
+                      <a:r>
+                        <a:rPr sz="1200">
+                          <a:solidFill>
+                            <a:srgbClr val="141414"/>
+                          </a:solidFill>
+                          <a:latin typeface="VTB Group UI Book" panose="020B0503040504020204" pitchFamily="34" charset="-52"/>
+                        </a:rPr>
+                        <a:t>Выделение, перемещение, стикеры (12 цветов), текст с форматированием, рисование (кисти, толщина, цвет), реакции (</a:t>
+                      </a:r>
+                      <a:r>
+                        <a:rPr sz="1200">
+                          <a:solidFill>
+                            <a:srgbClr val="141414"/>
+                          </a:solidFill>
+                          <a:highlight>
+                            <a:srgbClr val="FFFF00"/>
+                          </a:highlight>
+                          <a:latin typeface="VTB Group UI Book" panose="020B0503040504020204" pitchFamily="34" charset="-52"/>
+                        </a:rPr>
+                        <a:t>8</a:t>
+                      </a:r>
+                      <a:r>
+                        <a:rPr sz="1200">
+                          <a:solidFill>
+                            <a:srgbClr val="141414"/>
+                          </a:solidFill>
+                          <a:latin typeface="VTB Group UI Book" panose="020B0503040504020204" pitchFamily="34" charset="-52"/>
+                        </a:rPr>
+                        <a:t> видов), фреймы</a:t>
+                      </a:r>
+                      <a:endParaRPr lang="ru-RU">
+                        <a:latin typeface="VTB Group UI Book" panose="020B0503040504020204" pitchFamily="34" charset="-52"/>
+                      </a:endParaRPr>
+                    </a:p>
+                  </a:txBody>
+                  <a:tcPr marL="182880" marR="182880" anchor="ctr">
+                    <a:lnL w="12700" cap="flat" cmpd="sng" algn="ctr">
+                      <a:solidFill>
+                        <a:schemeClr val="tx1"/>
+                      </a:solidFill>
+                      <a:prstDash val="solid"/>
+                      <a:round/>
+                      <a:headEnd type="none" w="med" len="med"/>
+                      <a:tailEnd type="none" w="med" len="med"/>
+                    </a:lnL>
+                    <a:lnR w="12700" cap="flat" cmpd="sng" algn="ctr">
+                      <a:solidFill>
+                        <a:schemeClr val="tx1"/>
+                      </a:solidFill>
+                      <a:prstDash val="solid"/>
+                      <a:round/>
+                      <a:headEnd type="none" w="med" len="med"/>
+                      <a:tailEnd type="none" w="med" len="med"/>
+                    </a:lnR>
+                    <a:lnT w="12700" cap="flat" cmpd="sng" algn="ctr">
+                      <a:solidFill>
+                        <a:schemeClr val="tx1"/>
+                      </a:solidFill>
+                      <a:prstDash val="solid"/>
+                      <a:round/>
+                      <a:headEnd type="none" w="med" len="med"/>
+                      <a:tailEnd type="none" w="med" len="med"/>
+                    </a:lnT>
+                    <a:lnB w="12700" cap="flat" cmpd="sng" algn="ctr">
+                      <a:solidFill>
+                        <a:schemeClr val="tx1"/>
+                      </a:solidFill>
+                      <a:prstDash val="solid"/>
+                      <a:round/>
+                      <a:headEnd type="none" w="med" len="med"/>
+                      <a:tailEnd type="none" w="med" len="med"/>
+                    </a:lnB>
+                  </a:tcPr>
+                </a:tc>
+                <a:extLst>
+                  <a:ext uri="{0D108BD9-81ED-4DB2-BD59-A6C34878D82A}">
+                    <a16:rowId xmlns:a16="http://schemas.microsoft.com/office/drawing/2014/main" val="245367060"/>
+                  </a:ext>
+                </a:extLst>
+              </a:tr>
+              <a:tr h="690000">
+                <a:tc>
+                  <a:txBody>
+                    <a:bodyPr/>
+                    <a:lstStyle/>
+                    <a:p>
+                      <a:pPr algn="l"/>
+                      <a:r>
+                        <a:rPr sz="1400">
+                          <a:solidFill>
+                            <a:srgbClr val="141414"/>
+                          </a:solidFill>
+                          <a:latin typeface="VTB Group UI Book" panose="020B0503040504020204" pitchFamily="34" charset="-52"/>
+                        </a:rPr>
+                        <a:t>Управление доской</a:t>
+                      </a:r>
+                      <a:endParaRPr lang="ru-RU">
+                        <a:latin typeface="VTB Group UI Book" panose="020B0503040504020204" pitchFamily="34" charset="-52"/>
+                      </a:endParaRPr>
+                    </a:p>
+                  </a:txBody>
+                  <a:tcPr marL="182880" marR="182880" anchor="ctr">
+                    <a:lnL w="12700" cap="flat" cmpd="sng" algn="ctr">
+                      <a:solidFill>
+                        <a:schemeClr val="tx1"/>
+                      </a:solidFill>
+                      <a:prstDash val="solid"/>
+                      <a:round/>
+                      <a:headEnd type="none" w="med" len="med"/>
+                      <a:tailEnd type="none" w="med" len="med"/>
+                    </a:lnL>
+                    <a:lnR w="12700" cap="flat" cmpd="sng" algn="ctr">
+                      <a:solidFill>
+                        <a:schemeClr val="tx1"/>
+                      </a:solidFill>
+                      <a:prstDash val="solid"/>
+                      <a:round/>
+                      <a:headEnd type="none" w="med" len="med"/>
+                      <a:tailEnd type="none" w="med" len="med"/>
+                    </a:lnR>
+                    <a:lnT w="12700" cap="flat" cmpd="sng" algn="ctr">
+                      <a:solidFill>
+                        <a:schemeClr val="tx1"/>
+                      </a:solidFill>
+                      <a:prstDash val="solid"/>
+                      <a:round/>
+                      <a:headEnd type="none" w="med" len="med"/>
+                      <a:tailEnd type="none" w="med" len="med"/>
+                    </a:lnT>
+                    <a:lnB w="12700" cap="flat" cmpd="sng" algn="ctr">
+                      <a:solidFill>
+                        <a:schemeClr val="tx1"/>
+                      </a:solidFill>
+                      <a:prstDash val="solid"/>
+                      <a:round/>
+                      <a:headEnd type="none" w="med" len="med"/>
+                      <a:tailEnd type="none" w="med" len="med"/>
+                    </a:lnB>
+                  </a:tcPr>
+                </a:tc>
+                <a:tc>
+                  <a:txBody>
+                    <a:bodyPr/>
+                    <a:lstStyle/>
+                    <a:p>
+                      <a:pPr algn="l"/>
+                      <a:r>
+                        <a:rPr sz="1200">
+                          <a:solidFill>
+                            <a:srgbClr val="141414"/>
+                          </a:solidFill>
+                          <a:latin typeface="VTB Group UI Book" panose="020B0503040504020204" pitchFamily="34" charset="-52"/>
+                        </a:rPr>
+                        <a:t>Меню доски, переименование, экспорт, отмена и повтор действий, масштаб, таймер обсуждения, вид сетки (точки, линии, без сетки)</a:t>
+                      </a:r>
+                      <a:endParaRPr lang="ru-RU">
+                        <a:latin typeface="VTB Group UI Book" panose="020B0503040504020204" pitchFamily="34" charset="-52"/>
+                      </a:endParaRPr>
+                    </a:p>
+                  </a:txBody>
+                  <a:tcPr marL="182880" marR="182880" anchor="ctr">
+                    <a:lnL w="12700" cap="flat" cmpd="sng" algn="ctr">
+                      <a:solidFill>
+                        <a:schemeClr val="tx1"/>
+                      </a:solidFill>
+                      <a:prstDash val="solid"/>
+                      <a:round/>
+                      <a:headEnd type="none" w="med" len="med"/>
+                      <a:tailEnd type="none" w="med" len="med"/>
+                    </a:lnL>
+                    <a:lnR w="12700" cap="flat" cmpd="sng" algn="ctr">
+                      <a:solidFill>
+                        <a:schemeClr val="tx1"/>
+                      </a:solidFill>
+                      <a:prstDash val="solid"/>
+                      <a:round/>
+                      <a:headEnd type="none" w="med" len="med"/>
+                      <a:tailEnd type="none" w="med" len="med"/>
+                    </a:lnR>
+                    <a:lnT w="12700" cap="flat" cmpd="sng" algn="ctr">
+                      <a:solidFill>
+                        <a:schemeClr val="tx1"/>
+                      </a:solidFill>
+                      <a:prstDash val="solid"/>
+                      <a:round/>
+                      <a:headEnd type="none" w="med" len="med"/>
+                      <a:tailEnd type="none" w="med" len="med"/>
+                    </a:lnT>
+                    <a:lnB w="12700" cap="flat" cmpd="sng" algn="ctr">
+                      <a:solidFill>
+                        <a:schemeClr val="tx1"/>
+                      </a:solidFill>
+                      <a:prstDash val="solid"/>
+                      <a:round/>
+                      <a:headEnd type="none" w="med" len="med"/>
+                      <a:tailEnd type="none" w="med" len="med"/>
+                    </a:lnB>
+                  </a:tcPr>
+                </a:tc>
+                <a:extLst>
+                  <a:ext uri="{0D108BD9-81ED-4DB2-BD59-A6C34878D82A}">
+                    <a16:rowId xmlns:a16="http://schemas.microsoft.com/office/drawing/2014/main" val="1227496800"/>
+                  </a:ext>
+                </a:extLst>
+              </a:tr>
+              <a:tr h="690000">
+                <a:tc>
+                  <a:txBody>
+                    <a:bodyPr/>
+                    <a:lstStyle/>
+                    <a:p>
+                      <a:pPr algn="l"/>
+                      <a:r>
+                        <a:rPr sz="1400">
                           <a:solidFill>
                             <a:srgbClr val="141414"/>
                           </a:solidFill>
@@ -6470,13 +6762,13 @@
                     <a:p>
                       <a:pPr algn="l"/>
                       <a:r>
-                        <a:rPr sz="1400">
+                        <a:rPr sz="1200">
                           <a:solidFill>
                             <a:srgbClr val="141414"/>
                           </a:solidFill>
                           <a:latin typeface="VTB Group UI Book" panose="020B0503040504020204" pitchFamily="34" charset="-52"/>
                         </a:rPr>
-                        <a:t>Стикеры, текст, фигуры и рамки; курсоры и имена участников видны в реальном времени</a:t>
+                        <a:t>Изменения и курсоры с именами участников видны всем в реальном времени</a:t>
                       </a:r>
                       <a:endParaRPr lang="ru-RU">
                         <a:latin typeface="VTB Group UI Book" panose="020B0503040504020204" pitchFamily="34" charset="-52"/>
@@ -6524,70 +6816,11 @@
                 </a:tc>
                 <a:extLst>
                   <a:ext uri="{0D108BD9-81ED-4DB2-BD59-A6C34878D82A}">
-                    <a16:rowId xmlns:a16="http://schemas.microsoft.com/office/drawing/2014/main" val="484731448"/>
+                    <a16:rowId xmlns:a16="http://schemas.microsoft.com/office/drawing/2014/main" val="3916431223"/>
                   </a:ext>
                 </a:extLst>
               </a:tr>
-              <a:tr h="833330">
-                <a:tc>
-                  <a:txBody>
-                    <a:bodyPr/>
-                    <a:lstStyle/>
-                    <a:p>
-                      <a:pPr algn="l"/>
-                      <a:r>
-                        <a:rPr sz="1500">
-                          <a:solidFill>
-                            <a:srgbClr val="141414"/>
-                          </a:solidFill>
-                          <a:latin typeface="VTB Group UI Book" panose="020B0503040504020204" pitchFamily="34" charset="-52"/>
-                        </a:rPr>
-                        <a:t>История и личная копия</a:t>
-                      </a:r>
-                      <a:endParaRPr lang="ru-RU">
-                        <a:latin typeface="VTB Group UI Book" panose="020B0503040504020204" pitchFamily="34" charset="-52"/>
-                      </a:endParaRPr>
-                    </a:p>
-                  </a:txBody>
-                  <a:tcPr marL="182880" marR="182880" anchor="ctr">
-                    <a:lnL w="12700" cap="flat" cmpd="sng" algn="ctr">
-                      <a:solidFill>
-                        <a:schemeClr val="tx1"/>
-                      </a:solidFill>
-                      <a:prstDash val="solid"/>
-                      <a:round/>
-                      <a:headEnd type="none" w="med" len="med"/>
-                      <a:tailEnd type="none" w="med" len="med"/>
-                    </a:lnL>
-                    <a:lnR w="12700" cap="flat" cmpd="sng" algn="ctr">
-                      <a:solidFill>
-                        <a:schemeClr val="tx1"/>
-                      </a:solidFill>
-                      <a:prstDash val="solid"/>
-                      <a:round/>
-                      <a:headEnd type="none" w="med" len="med"/>
-                      <a:tailEnd type="none" w="med" len="med"/>
-                    </a:lnR>
-                    <a:lnT w="12700" cap="flat" cmpd="sng" algn="ctr">
-                      <a:solidFill>
-                        <a:schemeClr val="tx1"/>
-                      </a:solidFill>
-                      <a:prstDash val="solid"/>
-                      <a:round/>
-                      <a:headEnd type="none" w="med" len="med"/>
-                      <a:tailEnd type="none" w="med" len="med"/>
-                    </a:lnT>
-                    <a:lnB w="12700" cap="flat" cmpd="sng" algn="ctr">
-                      <a:solidFill>
-                        <a:schemeClr val="tx1"/>
-                      </a:solidFill>
-                      <a:prstDash val="solid"/>
-                      <a:round/>
-                      <a:headEnd type="none" w="med" len="med"/>
-                      <a:tailEnd type="none" w="med" len="med"/>
-                    </a:lnB>
-                  </a:tcPr>
-                </a:tc>
+              <a:tr h="690000">
                 <a:tc>
                   <a:txBody>
                     <a:bodyPr/>
@@ -6601,10 +6834,69 @@
                           </a:solidFill>
                           <a:latin typeface="VTB Group UI Book" panose="020B0503040504020204" pitchFamily="34" charset="-52"/>
                         </a:rPr>
-                        <a:t>Перед новой ВКС состояние доски уходит в бэкап (только просмотр); </a:t>
+                        <a:t>История (предварительно)</a:t>
+                      </a:r>
+                      <a:endParaRPr lang="ru-RU">
+                        <a:latin typeface="VTB Group UI Book" panose="020B0503040504020204" pitchFamily="34" charset="-52"/>
+                      </a:endParaRPr>
+                    </a:p>
+                  </a:txBody>
+                  <a:tcPr marL="182880" marR="182880" anchor="ctr">
+                    <a:lnL w="12700" cap="flat" cmpd="sng" algn="ctr">
+                      <a:solidFill>
+                        <a:schemeClr val="tx1"/>
+                      </a:solidFill>
+                      <a:prstDash val="solid"/>
+                      <a:round/>
+                      <a:headEnd type="none" w="med" len="med"/>
+                      <a:tailEnd type="none" w="med" len="med"/>
+                    </a:lnL>
+                    <a:lnR w="12700" cap="flat" cmpd="sng" algn="ctr">
+                      <a:solidFill>
+                        <a:schemeClr val="tx1"/>
+                      </a:solidFill>
+                      <a:prstDash val="solid"/>
+                      <a:round/>
+                      <a:headEnd type="none" w="med" len="med"/>
+                      <a:tailEnd type="none" w="med" len="med"/>
+                    </a:lnR>
+                    <a:lnT w="12700" cap="flat" cmpd="sng" algn="ctr">
+                      <a:solidFill>
+                        <a:schemeClr val="tx1"/>
+                      </a:solidFill>
+                      <a:prstDash val="solid"/>
+                      <a:round/>
+                      <a:headEnd type="none" w="med" len="med"/>
+                      <a:tailEnd type="none" w="med" len="med"/>
+                    </a:lnT>
+                    <a:lnB w="12700" cap="flat" cmpd="sng" algn="ctr">
+                      <a:solidFill>
+                        <a:schemeClr val="tx1"/>
+                      </a:solidFill>
+                      <a:prstDash val="solid"/>
+                      <a:round/>
+                      <a:headEnd type="none" w="med" len="med"/>
+                      <a:tailEnd type="none" w="med" len="med"/>
+                    </a:lnB>
+                  </a:tcPr>
+                </a:tc>
+                <a:tc>
+                  <a:txBody>
+                    <a:bodyPr/>
+                    <a:lstStyle/>
+                    <a:p>
+                      <a:pPr algn="l"/>
+                      <a:r>
+                        <a:rPr sz="1200">
+                          <a:solidFill>
+                            <a:srgbClr val="141414"/>
+                          </a:solidFill>
+                          <a:latin typeface="VTB Group UI Book" panose="020B0503040504020204" pitchFamily="34" charset="-52"/>
+                        </a:rPr>
+                        <a:t>Перед новой ВКС состояние доски сохраняется в бэкап с доступом только на просмотр. </a:t>
                       </a:r>
                       <a:r>
-                        <a:rPr sz="1400">
+                        <a:rPr sz="1200">
                           <a:solidFill>
                             <a:srgbClr val="141414"/>
                           </a:solidFill>
@@ -6613,7 +6905,7 @@
                           </a:highlight>
                           <a:latin typeface="VTB Group UI Book" panose="020B0503040504020204" pitchFamily="34" charset="-52"/>
                         </a:rPr>
-                        <a:t>доску можно скопировать в личное пространство</a:t>
+                        <a:t>Копия в личное пространство — после решения открытого вопроса 04</a:t>
                       </a:r>
                       <a:endParaRPr lang="ru-RU">
                         <a:highlight>
@@ -6664,7 +6956,7 @@
                 </a:tc>
                 <a:extLst>
                   <a:ext uri="{0D108BD9-81ED-4DB2-BD59-A6C34878D82A}">
-                    <a16:rowId xmlns:a16="http://schemas.microsoft.com/office/drawing/2014/main" val="800703812"/>
+                    <a16:rowId xmlns:a16="http://schemas.microsoft.com/office/drawing/2014/main" val="731465823"/>
                   </a:ext>
                 </a:extLst>
               </a:tr>
@@ -6767,14 +7059,14 @@
           <p:nvPr>
             <p:extLst>
               <p:ext uri="{D42A27DB-BD31-4B8C-83A1-F6EECF244321}">
-                <p14:modId xmlns:p14="http://schemas.microsoft.com/office/powerpoint/2010/main" val="635499141"/>
+                <p14:modId xmlns:p14="http://schemas.microsoft.com/office/powerpoint/2010/main" val="201611862"/>
               </p:ext>
             </p:extLst>
           </p:nvPr>
         </p:nvGraphicFramePr>
         <p:xfrm>
           <a:off x="534295" y="1453313"/>
-          <a:ext cx="11261464" cy="4760013"/>
+          <a:ext cx="11261464" cy="5311813"/>
         </p:xfrm>
         <a:graphic>
           <a:graphicData uri="http://schemas.openxmlformats.org/drawingml/2006/table">
@@ -6917,7 +7209,7 @@
                   </a:ext>
                 </a:extLst>
               </a:tr>
-              <a:tr h="833330">
+              <a:tr h="690000">
                 <a:tc>
                   <a:txBody>
                     <a:bodyPr/>
@@ -6925,7 +7217,7 @@
                     <a:p>
                       <a:pPr algn="l"/>
                       <a:r>
-                        <a:rPr sz="1500">
+                        <a:rPr sz="1400">
                           <a:solidFill>
                             <a:srgbClr val="141414"/>
                           </a:solidFill>
@@ -6984,65 +7276,14 @@
                     <a:p>
                       <a:pPr algn="l"/>
                       <a:r>
-                        <a:rPr lang="ru-RU" sz="1400">
+                        <a:rPr lang="ru-RU" sz="1200">
                           <a:solidFill>
                             <a:srgbClr val="141414"/>
                           </a:solidFill>
                           <a:latin typeface="VTB Group UI Book" panose="020B0503040504020204" pitchFamily="34" charset="-52"/>
                         </a:rPr>
-                        <a:t>Доска создаётся не дольше </a:t>
+                        <a:t>Доска создаётся не дольше 3 с после «Оповестить», параллельно: отправка оповещения её не ждёт. Правки видны участникам не позже 1 с (95% случаев, 25 участников)</a:t>
                       </a:r>
-                      <a:r>
-                        <a:rPr lang="ru-RU" sz="1400">
-                          <a:solidFill>
-                            <a:srgbClr val="141414"/>
-                          </a:solidFill>
-                          <a:highlight>
-                            <a:srgbClr val="FFFF00"/>
-                          </a:highlight>
-                          <a:latin typeface="VTB Group UI Book" panose="020B0503040504020204" pitchFamily="34" charset="-52"/>
-                        </a:rPr>
-                        <a:t>3 с </a:t>
-                      </a:r>
-                      <a:r>
-                        <a:rPr lang="ru-RU" sz="1400">
-                          <a:solidFill>
-                            <a:srgbClr val="141414"/>
-                          </a:solidFill>
-                          <a:latin typeface="VTB Group UI Book" panose="020B0503040504020204" pitchFamily="34" charset="-52"/>
-                        </a:rPr>
-                        <a:t>после «Оповестить»; </a:t>
-                      </a:r>
-                    </a:p>
-                    <a:p>
-                      <a:pPr algn="l"/>
-                      <a:r>
-                        <a:rPr lang="ru-RU" sz="1400">
-                          <a:solidFill>
-                            <a:srgbClr val="141414"/>
-                          </a:solidFill>
-                          <a:latin typeface="VTB Group UI Book" panose="020B0503040504020204" pitchFamily="34" charset="-52"/>
-                        </a:rPr>
-                        <a:t>Правки видны участникам не позже чем через </a:t>
-                      </a:r>
-                      <a:r>
-                        <a:rPr lang="ru-RU" sz="1400">
-                          <a:solidFill>
-                            <a:srgbClr val="141414"/>
-                          </a:solidFill>
-                          <a:highlight>
-                            <a:srgbClr val="FFFF00"/>
-                          </a:highlight>
-                          <a:latin typeface="VTB Group UI Book" panose="020B0503040504020204" pitchFamily="34" charset="-52"/>
-                        </a:rPr>
-                        <a:t>1 с (больше - дискомфорт)</a:t>
-                      </a:r>
-                      <a:endParaRPr lang="ru-RU">
-                        <a:highlight>
-                          <a:srgbClr val="FFFF00"/>
-                        </a:highlight>
-                        <a:latin typeface="VTB Group UI Book" panose="020B0503040504020204" pitchFamily="34" charset="-52"/>
-                      </a:endParaRPr>
                     </a:p>
                   </a:txBody>
                   <a:tcPr marL="182880" marR="182880" anchor="ctr">
@@ -7090,7 +7331,7 @@
                   </a:ext>
                 </a:extLst>
               </a:tr>
-              <a:tr h="833330">
+              <a:tr h="690000">
                 <a:tc>
                   <a:txBody>
                     <a:bodyPr/>
@@ -7098,13 +7339,13 @@
                     <a:p>
                       <a:pPr algn="l"/>
                       <a:r>
-                        <a:rPr lang="ru-RU" sz="1500">
+                        <a:rPr sz="1400">
                           <a:solidFill>
                             <a:srgbClr val="141414"/>
                           </a:solidFill>
                           <a:latin typeface="VTB Group UI Book" panose="020B0503040504020204" pitchFamily="34" charset="-52"/>
                         </a:rPr>
-                        <a:t>Количество одновременных участников</a:t>
+                        <a:t>Одновременные участники</a:t>
                       </a:r>
                       <a:endParaRPr lang="ru-RU">
                         <a:latin typeface="VTB Group UI Book" panose="020B0503040504020204" pitchFamily="34" charset="-52"/>
@@ -7157,56 +7398,14 @@
                     <a:p>
                       <a:pPr algn="l"/>
                       <a:r>
-                        <a:rPr lang="ru-RU" sz="1400">
+                        <a:rPr lang="ru-RU" sz="1200">
                           <a:solidFill>
                             <a:srgbClr val="141414"/>
                           </a:solidFill>
                           <a:latin typeface="VTB Group UI Book" panose="020B0503040504020204" pitchFamily="34" charset="-52"/>
                         </a:rPr>
-                        <a:t>Среднее кол-во участников в ВКС</a:t>
+                        <a:t>Не менее 25 редакторов без деградации; до 50 — задержка правок до 2 с. Остальные участники ВКС — просмотр по ссылке или демонстрация экрана</a:t>
                       </a:r>
-                      <a:r>
-                        <a:rPr lang="en-US" sz="1400">
-                          <a:solidFill>
-                            <a:srgbClr val="141414"/>
-                          </a:solidFill>
-                          <a:latin typeface="VTB Group UI Book" panose="020B0503040504020204" pitchFamily="34" charset="-52"/>
-                        </a:rPr>
-                        <a:t>: </a:t>
-                      </a:r>
-                      <a:r>
-                        <a:rPr lang="en-US" sz="1400">
-                          <a:solidFill>
-                            <a:srgbClr val="141414"/>
-                          </a:solidFill>
-                          <a:highlight>
-                            <a:srgbClr val="FFFF00"/>
-                          </a:highlight>
-                          <a:latin typeface="VTB Group UI Book" panose="020B0503040504020204" pitchFamily="34" charset="-52"/>
-                        </a:rPr>
-                        <a:t>50</a:t>
-                      </a:r>
-                      <a:r>
-                        <a:rPr lang="en-US" sz="1400">
-                          <a:solidFill>
-                            <a:srgbClr val="141414"/>
-                          </a:solidFill>
-                          <a:latin typeface="VTB Group UI Book" panose="020B0503040504020204" pitchFamily="34" charset="-52"/>
-                        </a:rPr>
-                        <a:t> </a:t>
-                      </a:r>
-                      <a:r>
-                        <a:rPr lang="ru-RU" sz="1400">
-                          <a:solidFill>
-                            <a:srgbClr val="141414"/>
-                          </a:solidFill>
-                          <a:latin typeface="VTB Group UI Book" panose="020B0503040504020204" pitchFamily="34" charset="-52"/>
-                        </a:rPr>
-                        <a:t>(до 1000 возможно), но присоединение к доске архитектурно нереализуемо такого кол-ва. Одновременное удержание на доске 25, с деградациями до 50.</a:t>
-                      </a:r>
-                      <a:endParaRPr lang="ru-RU">
-                        <a:latin typeface="VTB Group UI Book" panose="020B0503040504020204" pitchFamily="34" charset="-52"/>
-                      </a:endParaRPr>
                     </a:p>
                   </a:txBody>
                   <a:tcPr marL="182880" marR="182880" anchor="ctr">
@@ -7250,11 +7449,11 @@
                 </a:tc>
                 <a:extLst>
                   <a:ext uri="{0D108BD9-81ED-4DB2-BD59-A6C34878D82A}">
-                    <a16:rowId xmlns:a16="http://schemas.microsoft.com/office/drawing/2014/main" val="1610479619"/>
+                    <a16:rowId xmlns:a16="http://schemas.microsoft.com/office/drawing/2014/main" val="2138346606"/>
                   </a:ext>
                 </a:extLst>
               </a:tr>
-              <a:tr h="833330">
+              <a:tr h="690000">
                 <a:tc>
                   <a:txBody>
                     <a:bodyPr/>
@@ -7262,13 +7461,13 @@
                     <a:p>
                       <a:pPr algn="l"/>
                       <a:r>
-                        <a:rPr lang="ru-RU" sz="1500">
+                        <a:rPr sz="1400">
                           <a:solidFill>
                             <a:srgbClr val="141414"/>
                           </a:solidFill>
                           <a:latin typeface="VTB Group UI Book" panose="020B0503040504020204" pitchFamily="34" charset="-52"/>
                         </a:rPr>
-                        <a:t>Ролевой доступ</a:t>
+                        <a:t>Доступ и безопасность</a:t>
                       </a:r>
                       <a:endParaRPr lang="ru-RU">
                         <a:latin typeface="VTB Group UI Book" panose="020B0503040504020204" pitchFamily="34" charset="-52"/>
@@ -7321,35 +7520,26 @@
                     <a:p>
                       <a:pPr algn="l"/>
                       <a:r>
-                        <a:rPr lang="ru-RU" sz="1400">
+                        <a:rPr lang="ru-RU" sz="1200">
+                          <a:solidFill>
+                            <a:srgbClr val="141414"/>
+                          </a:solidFill>
+                          <a:highlight>
+                            <a:srgbClr val="FFFF00"/>
+                          </a:highlight>
+                          <a:latin typeface="VTB Group UI Book" panose="020B0503040504020204" pitchFamily="34" charset="-52"/>
+                        </a:rPr>
+                        <a:t>Вход через корпоративную учётную запись</a:t>
+                      </a:r>
+                      <a:r>
+                        <a:rPr lang="ru-RU" sz="1200">
                           <a:solidFill>
                             <a:srgbClr val="141414"/>
                           </a:solidFill>
                           <a:latin typeface="VTB Group UI Book" panose="020B0503040504020204" pitchFamily="34" charset="-52"/>
                         </a:rPr>
-                        <a:t>Роли </a:t>
+                        <a:t>. Роли «редактор» и «просмотр»: дежурный — редактор по умолчанию и выдаёт роли. Журнал действий на доске</a:t>
                       </a:r>
-                      <a:r>
-                        <a:rPr sz="1400">
-                          <a:solidFill>
-                            <a:srgbClr val="141414"/>
-                          </a:solidFill>
-                          <a:latin typeface="VTB Group UI Book" panose="020B0503040504020204" pitchFamily="34" charset="-52"/>
-                        </a:rPr>
-                        <a:t>«редактор» и «просмотр»</a:t>
-                      </a:r>
-                      <a:r>
-                        <a:rPr lang="ru-RU" sz="1400">
-                          <a:solidFill>
-                            <a:srgbClr val="141414"/>
-                          </a:solidFill>
-                          <a:latin typeface="VTB Group UI Book" panose="020B0503040504020204" pitchFamily="34" charset="-52"/>
-                        </a:rPr>
-                        <a:t>, предоставление доступа к доске не всем пользователям ВКС.</a:t>
-                      </a:r>
-                      <a:endParaRPr lang="ru-RU">
-                        <a:latin typeface="VTB Group UI Book" panose="020B0503040504020204" pitchFamily="34" charset="-52"/>
-                      </a:endParaRPr>
                     </a:p>
                   </a:txBody>
                   <a:tcPr marL="182880" marR="182880" anchor="ctr">
@@ -7393,11 +7583,11 @@
                 </a:tc>
                 <a:extLst>
                   <a:ext uri="{0D108BD9-81ED-4DB2-BD59-A6C34878D82A}">
-                    <a16:rowId xmlns:a16="http://schemas.microsoft.com/office/drawing/2014/main" val="2793033974"/>
+                    <a16:rowId xmlns:a16="http://schemas.microsoft.com/office/drawing/2014/main" val="2146945047"/>
                   </a:ext>
                 </a:extLst>
               </a:tr>
-              <a:tr h="833330">
+              <a:tr h="690000">
                 <a:tc>
                   <a:txBody>
                     <a:bodyPr/>
@@ -7405,7 +7595,7 @@
                     <a:p>
                       <a:pPr algn="l"/>
                       <a:r>
-                        <a:rPr sz="1500">
+                        <a:rPr sz="1400">
                           <a:solidFill>
                             <a:srgbClr val="141414"/>
                           </a:solidFill>
@@ -7464,13 +7654,76 @@
                     <a:p>
                       <a:pPr algn="l"/>
                       <a:r>
+                        <a:rPr lang="ru-RU" sz="1200">
+                          <a:solidFill>
+                            <a:srgbClr val="141414"/>
+                          </a:solidFill>
+                          <a:latin typeface="VTB Group UI Book" panose="020B0503040504020204" pitchFamily="34" charset="-52"/>
+                        </a:rPr>
+                        <a:t>Сбой создания доски не блокирует ВКС и оповещение. Автосохранение: потеря не более 5 с изменений. Бэкап при каждой новой ВКС</a:t>
+                      </a:r>
+                    </a:p>
+                  </a:txBody>
+                  <a:tcPr marL="182880" marR="182880" anchor="ctr">
+                    <a:lnL w="12700" cap="flat" cmpd="sng" algn="ctr">
+                      <a:solidFill>
+                        <a:schemeClr val="tx1"/>
+                      </a:solidFill>
+                      <a:prstDash val="solid"/>
+                      <a:round/>
+                      <a:headEnd type="none" w="med" len="med"/>
+                      <a:tailEnd type="none" w="med" len="med"/>
+                    </a:lnL>
+                    <a:lnR w="12700" cap="flat" cmpd="sng" algn="ctr">
+                      <a:solidFill>
+                        <a:schemeClr val="tx1"/>
+                      </a:solidFill>
+                      <a:prstDash val="solid"/>
+                      <a:round/>
+                      <a:headEnd type="none" w="med" len="med"/>
+                      <a:tailEnd type="none" w="med" len="med"/>
+                    </a:lnR>
+                    <a:lnT w="12700" cap="flat" cmpd="sng" algn="ctr">
+                      <a:solidFill>
+                        <a:schemeClr val="tx1"/>
+                      </a:solidFill>
+                      <a:prstDash val="solid"/>
+                      <a:round/>
+                      <a:headEnd type="none" w="med" len="med"/>
+                      <a:tailEnd type="none" w="med" len="med"/>
+                    </a:lnT>
+                    <a:lnB w="12700" cap="flat" cmpd="sng" algn="ctr">
+                      <a:solidFill>
+                        <a:schemeClr val="tx1"/>
+                      </a:solidFill>
+                      <a:prstDash val="solid"/>
+                      <a:round/>
+                      <a:headEnd type="none" w="med" len="med"/>
+                      <a:tailEnd type="none" w="med" len="med"/>
+                    </a:lnB>
+                  </a:tcPr>
+                </a:tc>
+                <a:extLst>
+                  <a:ext uri="{0D108BD9-81ED-4DB2-BD59-A6C34878D82A}">
+                    <a16:rowId xmlns:a16="http://schemas.microsoft.com/office/drawing/2014/main" val="829651384"/>
+                  </a:ext>
+                </a:extLst>
+              </a:tr>
+              <a:tr h="690000">
+                <a:tc>
+                  <a:txBody>
+                    <a:bodyPr/>
+                    <a:lstStyle/>
+                    <a:p>
+                      <a:pPr algn="l"/>
+                      <a:r>
                         <a:rPr sz="1400">
                           <a:solidFill>
                             <a:srgbClr val="141414"/>
                           </a:solidFill>
                           <a:latin typeface="VTB Group UI Book" panose="020B0503040504020204" pitchFamily="34" charset="-52"/>
                         </a:rPr>
-                        <a:t>Сбой создания доски не блокирует ВКС и оповещение; автосохранение изменений и бэкап при каждой новой ВКС</a:t>
+                        <a:t>Хранение данных</a:t>
                       </a:r>
                       <a:endParaRPr lang="ru-RU">
                         <a:latin typeface="VTB Group UI Book" panose="020B0503040504020204" pitchFamily="34" charset="-52"/>
@@ -7516,13 +7769,6 @@
                     </a:lnB>
                   </a:tcPr>
                 </a:tc>
-                <a:extLst>
-                  <a:ext uri="{0D108BD9-81ED-4DB2-BD59-A6C34878D82A}">
-                    <a16:rowId xmlns:a16="http://schemas.microsoft.com/office/drawing/2014/main" val="484731448"/>
-                  </a:ext>
-                </a:extLst>
-              </a:tr>
-              <a:tr h="833330">
                 <a:tc>
                   <a:txBody>
                     <a:bodyPr/>
@@ -7530,7 +7776,237 @@
                     <a:p>
                       <a:pPr algn="l"/>
                       <a:r>
-                        <a:rPr sz="1500">
+                        <a:rPr lang="ru-RU" sz="1200">
+                          <a:solidFill>
+                            <a:srgbClr val="141414"/>
+                          </a:solidFill>
+                          <a:latin typeface="VTB Group UI Book" panose="020B0503040504020204" pitchFamily="34" charset="-52"/>
+                        </a:rPr>
+                        <a:t>Данные аварии и доски хранятся внутри контура банка. </a:t>
+                      </a:r>
+                      <a:r>
+                        <a:rPr lang="ru-RU" sz="1200">
+                          <a:solidFill>
+                            <a:srgbClr val="141414"/>
+                          </a:solidFill>
+                          <a:highlight>
+                            <a:srgbClr val="FFFF00"/>
+                          </a:highlight>
+                          <a:latin typeface="VTB Group UI Book" panose="020B0503040504020204" pitchFamily="34" charset="-52"/>
+                        </a:rPr>
+                        <a:t>Срок хранения бэкапов — по решению открытого вопроса 03</a:t>
+                      </a:r>
+                    </a:p>
+                  </a:txBody>
+                  <a:tcPr marL="182880" marR="182880" anchor="ctr">
+                    <a:lnL w="12700" cap="flat" cmpd="sng" algn="ctr">
+                      <a:solidFill>
+                        <a:schemeClr val="tx1"/>
+                      </a:solidFill>
+                      <a:prstDash val="solid"/>
+                      <a:round/>
+                      <a:headEnd type="none" w="med" len="med"/>
+                      <a:tailEnd type="none" w="med" len="med"/>
+                    </a:lnL>
+                    <a:lnR w="12700" cap="flat" cmpd="sng" algn="ctr">
+                      <a:solidFill>
+                        <a:schemeClr val="tx1"/>
+                      </a:solidFill>
+                      <a:prstDash val="solid"/>
+                      <a:round/>
+                      <a:headEnd type="none" w="med" len="med"/>
+                      <a:tailEnd type="none" w="med" len="med"/>
+                    </a:lnR>
+                    <a:lnT w="12700" cap="flat" cmpd="sng" algn="ctr">
+                      <a:solidFill>
+                        <a:schemeClr val="tx1"/>
+                      </a:solidFill>
+                      <a:prstDash val="solid"/>
+                      <a:round/>
+                      <a:headEnd type="none" w="med" len="med"/>
+                      <a:tailEnd type="none" w="med" len="med"/>
+                    </a:lnT>
+                    <a:lnB w="12700" cap="flat" cmpd="sng" algn="ctr">
+                      <a:solidFill>
+                        <a:schemeClr val="tx1"/>
+                      </a:solidFill>
+                      <a:prstDash val="solid"/>
+                      <a:round/>
+                      <a:headEnd type="none" w="med" len="med"/>
+                      <a:tailEnd type="none" w="med" len="med"/>
+                    </a:lnB>
+                  </a:tcPr>
+                </a:tc>
+                <a:extLst>
+                  <a:ext uri="{0D108BD9-81ED-4DB2-BD59-A6C34878D82A}">
+                    <a16:rowId xmlns:a16="http://schemas.microsoft.com/office/drawing/2014/main" val="3955095157"/>
+                  </a:ext>
+                </a:extLst>
+              </a:tr>
+              <a:tr h="690000">
+                <a:tc>
+                  <a:txBody>
+                    <a:bodyPr/>
+                    <a:lstStyle/>
+                    <a:p>
+                      <a:pPr algn="l"/>
+                      <a:r>
+                        <a:rPr sz="1400">
+                          <a:solidFill>
+                            <a:srgbClr val="141414"/>
+                          </a:solidFill>
+                          <a:latin typeface="VTB Group UI Book" panose="020B0503040504020204" pitchFamily="34" charset="-52"/>
+                        </a:rPr>
+                        <a:t>Масштабирование</a:t>
+                      </a:r>
+                      <a:endParaRPr lang="ru-RU">
+                        <a:latin typeface="VTB Group UI Book" panose="020B0503040504020204" pitchFamily="34" charset="-52"/>
+                      </a:endParaRPr>
+                    </a:p>
+                  </a:txBody>
+                  <a:tcPr marL="182880" marR="182880" anchor="ctr">
+                    <a:lnL w="12700" cap="flat" cmpd="sng" algn="ctr">
+                      <a:solidFill>
+                        <a:schemeClr val="tx1"/>
+                      </a:solidFill>
+                      <a:prstDash val="solid"/>
+                      <a:round/>
+                      <a:headEnd type="none" w="med" len="med"/>
+                      <a:tailEnd type="none" w="med" len="med"/>
+                    </a:lnL>
+                    <a:lnR w="12700" cap="flat" cmpd="sng" algn="ctr">
+                      <a:solidFill>
+                        <a:schemeClr val="tx1"/>
+                      </a:solidFill>
+                      <a:prstDash val="solid"/>
+                      <a:round/>
+                      <a:headEnd type="none" w="med" len="med"/>
+                      <a:tailEnd type="none" w="med" len="med"/>
+                    </a:lnR>
+                    <a:lnT w="12700" cap="flat" cmpd="sng" algn="ctr">
+                      <a:solidFill>
+                        <a:schemeClr val="tx1"/>
+                      </a:solidFill>
+                      <a:prstDash val="solid"/>
+                      <a:round/>
+                      <a:headEnd type="none" w="med" len="med"/>
+                      <a:tailEnd type="none" w="med" len="med"/>
+                    </a:lnT>
+                    <a:lnB w="12700" cap="flat" cmpd="sng" algn="ctr">
+                      <a:solidFill>
+                        <a:schemeClr val="tx1"/>
+                      </a:solidFill>
+                      <a:prstDash val="solid"/>
+                      <a:round/>
+                      <a:headEnd type="none" w="med" len="med"/>
+                      <a:tailEnd type="none" w="med" len="med"/>
+                    </a:lnB>
+                  </a:tcPr>
+                </a:tc>
+                <a:tc>
+                  <a:txBody>
+                    <a:bodyPr/>
+                    <a:lstStyle/>
+                    <a:p>
+                      <a:pPr algn="l"/>
+                      <a:r>
+                        <a:rPr lang="ru-RU" sz="1200">
+                          <a:solidFill>
+                            <a:srgbClr val="141414"/>
+                          </a:solidFill>
+                          <a:latin typeface="VTB Group UI Book" panose="020B0503040504020204" pitchFamily="34" charset="-52"/>
+                        </a:rPr>
+                        <a:t>Не менее </a:t>
+                      </a:r>
+                      <a:r>
+                        <a:rPr lang="ru-RU" sz="1200">
+                          <a:solidFill>
+                            <a:srgbClr val="141414"/>
+                          </a:solidFill>
+                          <a:highlight>
+                            <a:srgbClr val="FFFF00"/>
+                          </a:highlight>
+                          <a:latin typeface="VTB Group UI Book" panose="020B0503040504020204" pitchFamily="34" charset="-52"/>
+                        </a:rPr>
+                        <a:t>10</a:t>
+                      </a:r>
+                      <a:r>
+                        <a:rPr lang="ru-RU" sz="1200">
+                          <a:solidFill>
+                            <a:srgbClr val="141414"/>
+                          </a:solidFill>
+                          <a:latin typeface="VTB Group UI Book" panose="020B0503040504020204" pitchFamily="34" charset="-52"/>
+                        </a:rPr>
+                        <a:t> одновременно активных досок — по числу параллельных аварий .</a:t>
+                      </a:r>
+                      <a:r>
+                        <a:rPr lang="ru-RU" sz="1200">
+                          <a:solidFill>
+                            <a:srgbClr val="141414"/>
+                          </a:solidFill>
+                          <a:highlight>
+                            <a:srgbClr val="FFFF00"/>
+                          </a:highlight>
+                          <a:latin typeface="VTB Group UI Book" panose="020B0503040504020204" pitchFamily="34" charset="-52"/>
+                        </a:rPr>
+                        <a:t> (узнать среднее кол-во открытых конференций по авариям)</a:t>
+                      </a:r>
+                    </a:p>
+                  </a:txBody>
+                  <a:tcPr marL="182880" marR="182880" anchor="ctr">
+                    <a:lnL w="12700" cap="flat" cmpd="sng" algn="ctr">
+                      <a:solidFill>
+                        <a:schemeClr val="tx1"/>
+                      </a:solidFill>
+                      <a:prstDash val="solid"/>
+                      <a:round/>
+                      <a:headEnd type="none" w="med" len="med"/>
+                      <a:tailEnd type="none" w="med" len="med"/>
+                    </a:lnL>
+                    <a:lnR w="12700" cap="flat" cmpd="sng" algn="ctr">
+                      <a:solidFill>
+                        <a:schemeClr val="tx1"/>
+                      </a:solidFill>
+                      <a:prstDash val="solid"/>
+                      <a:round/>
+                      <a:headEnd type="none" w="med" len="med"/>
+                      <a:tailEnd type="none" w="med" len="med"/>
+                    </a:lnR>
+                    <a:lnT w="12700" cap="flat" cmpd="sng" algn="ctr">
+                      <a:solidFill>
+                        <a:schemeClr val="tx1"/>
+                      </a:solidFill>
+                      <a:prstDash val="solid"/>
+                      <a:round/>
+                      <a:headEnd type="none" w="med" len="med"/>
+                      <a:tailEnd type="none" w="med" len="med"/>
+                    </a:lnT>
+                    <a:lnB w="12700" cap="flat" cmpd="sng" algn="ctr">
+                      <a:solidFill>
+                        <a:schemeClr val="tx1"/>
+                      </a:solidFill>
+                      <a:prstDash val="solid"/>
+                      <a:round/>
+                      <a:headEnd type="none" w="med" len="med"/>
+                      <a:tailEnd type="none" w="med" len="med"/>
+                    </a:lnB>
+                  </a:tcPr>
+                </a:tc>
+                <a:extLst>
+                  <a:ext uri="{0D108BD9-81ED-4DB2-BD59-A6C34878D82A}">
+                    <a16:rowId xmlns:a16="http://schemas.microsoft.com/office/drawing/2014/main" val="2218625412"/>
+                  </a:ext>
+                </a:extLst>
+              </a:tr>
+              <a:tr h="690000">
+                <a:tc>
+                  <a:txBody>
+                    <a:bodyPr/>
+                    <a:lstStyle/>
+                    <a:p>
+                      <a:pPr algn="l"/>
+                      <a:r>
+                        <a:rPr sz="1400">
                           <a:solidFill>
                             <a:srgbClr val="141414"/>
                           </a:solidFill>
@@ -7589,10 +8065,16 @@
                     <a:p>
                       <a:pPr algn="l"/>
                       <a:r>
-                        <a:rPr lang="ru-RU" sz="1400">
+                        <a:rPr lang="ru-RU" sz="1200">
+                          <a:solidFill>
+                            <a:srgbClr val="141414"/>
+                          </a:solidFill>
+                          <a:highlight>
+                            <a:srgbClr val="FFFF00"/>
+                          </a:highlight>
                           <a:latin typeface="VTB Group UI Book" panose="020B0503040504020204" pitchFamily="34" charset="-52"/>
                         </a:rPr>
-                        <a:t>Доступ внутри корпоративной среды либо только из внешней. Компромисс невозможен.</a:t>
+                        <a:t>Актуальные Chrome, Edge, Яндекс Браузер; экран от 1366×768. Работа рядом с DION в отдельной вкладке. Выбор контура — открытый вопрос 05</a:t>
                       </a:r>
                     </a:p>
                   </a:txBody>
@@ -7637,7 +8119,7 @@
                 </a:tc>
                 <a:extLst>
                   <a:ext uri="{0D108BD9-81ED-4DB2-BD59-A6C34878D82A}">
-                    <a16:rowId xmlns:a16="http://schemas.microsoft.com/office/drawing/2014/main" val="800703812"/>
+                    <a16:rowId xmlns:a16="http://schemas.microsoft.com/office/drawing/2014/main" val="252845161"/>
                   </a:ext>
                 </a:extLst>
               </a:tr>

--- a/презентация.pptx
+++ b/презентация.pptx
@@ -16,15 +16,15 @@
     <p:sldId id="271" r:id="rId7"/>
     <p:sldId id="276" r:id="rId8"/>
     <p:sldId id="283" r:id="rId9"/>
-    <p:sldId id="258" r:id="rId10"/>
-    <p:sldId id="273" r:id="rId11"/>
-    <p:sldId id="274" r:id="rId12"/>
-    <p:sldId id="266" r:id="rId13"/>
-    <p:sldId id="261" r:id="rId14"/>
-    <p:sldId id="269" r:id="rId15"/>
-    <p:sldId id="270" r:id="rId16"/>
-    <p:sldId id="277" r:id="rId17"/>
-    <p:sldId id="280" r:id="rId18"/>
+    <p:sldId id="285" r:id="rId10"/>
+    <p:sldId id="258" r:id="rId11"/>
+    <p:sldId id="273" r:id="rId12"/>
+    <p:sldId id="274" r:id="rId13"/>
+    <p:sldId id="266" r:id="rId14"/>
+    <p:sldId id="261" r:id="rId15"/>
+    <p:sldId id="269" r:id="rId16"/>
+    <p:sldId id="270" r:id="rId17"/>
+    <p:sldId id="277" r:id="rId18"/>
   </p:sldIdLst>
   <p:sldSz cx="12192000" cy="6858000"/>
   <p:notesSz cx="6858000" cy="12192000"/>
@@ -366,6 +366,90 @@
   <p:cSld>
     <p:spTree>
       <p:nvGrpSpPr>
+        <p:cNvPr id="1" name=""/>
+        <p:cNvGrpSpPr/>
+        <p:nvPr/>
+      </p:nvGrpSpPr>
+      <p:grpSpPr>
+        <a:xfrm>
+          <a:off x="0" y="0"/>
+          <a:ext cx="0" cy="0"/>
+          <a:chOff x="0" y="0"/>
+          <a:chExt cx="0" cy="0"/>
+        </a:xfrm>
+      </p:grpSpPr>
+      <p:sp>
+        <p:nvSpPr>
+          <p:cNvPr id="2" name="Slide Image Placeholder 1"/>
+          <p:cNvSpPr>
+            <a:spLocks noGrp="1" noRot="1" noChangeAspect="1"/>
+          </p:cNvSpPr>
+          <p:nvPr>
+            <p:ph type="sldImg"/>
+          </p:nvPr>
+        </p:nvSpPr>
+        <p:spPr/>
+      </p:sp>
+      <p:sp>
+        <p:nvSpPr>
+          <p:cNvPr id="3" name="Notes Placeholder 2"/>
+          <p:cNvSpPr>
+            <a:spLocks noGrp="1"/>
+          </p:cNvSpPr>
+          <p:nvPr>
+            <p:ph type="body" idx="1"/>
+          </p:nvPr>
+        </p:nvSpPr>
+        <p:spPr/>
+        <p:txBody>
+          <a:bodyPr/>
+          <a:lstStyle/>
+          <a:p>
+            <a:endParaRPr lang="en-US" dirty="0"/>
+          </a:p>
+        </p:txBody>
+      </p:sp>
+      <p:sp>
+        <p:nvSpPr>
+          <p:cNvPr id="4" name="Slide Number Placeholder 3"/>
+          <p:cNvSpPr>
+            <a:spLocks noGrp="1"/>
+          </p:cNvSpPr>
+          <p:nvPr>
+            <p:ph type="sldNum" sz="quarter" idx="10"/>
+          </p:nvPr>
+        </p:nvSpPr>
+        <p:spPr/>
+        <p:txBody>
+          <a:bodyPr/>
+          <a:lstStyle/>
+          <a:p>
+            <a:fld id="{F7021451-1387-4CA6-816F-3879F97B5CBC}" type="slidenum">
+              <a:rPr lang="en-US"/>
+              <a:t>10</a:t>
+            </a:fld>
+            <a:endParaRPr lang="en-US"/>
+          </a:p>
+        </p:txBody>
+      </p:sp>
+    </p:spTree>
+    <p:extLst>
+      <p:ext uri="{BB962C8B-B14F-4D97-AF65-F5344CB8AC3E}">
+        <p14:creationId xmlns:p14="http://schemas.microsoft.com/office/powerpoint/2010/main" val="1024086991"/>
+      </p:ext>
+    </p:extLst>
+  </p:cSld>
+  <p:clrMapOvr>
+    <a:masterClrMapping/>
+  </p:clrMapOvr>
+</p:notes>
+</file>
+
+<file path=ppt/notesSlides/notesSlide11.xml><?xml version="1.0" encoding="utf-8"?>
+<p:notes xmlns:a="http://schemas.openxmlformats.org/drawingml/2006/main" xmlns:r="http://schemas.openxmlformats.org/officeDocument/2006/relationships" xmlns:p="http://schemas.openxmlformats.org/presentationml/2006/main">
+  <p:cSld>
+    <p:spTree>
+      <p:nvGrpSpPr>
         <p:cNvPr id="1" name="">
           <a:extLst>
             <a:ext uri="{FF2B5EF4-FFF2-40B4-BE49-F238E27FC236}">
@@ -450,7 +534,7 @@
           <a:p>
             <a:fld id="{F7021451-1387-4CA6-816F-3879F97B5CBC}" type="slidenum">
               <a:rPr lang="en-US"/>
-              <a:t>10</a:t>
+              <a:t>11</a:t>
             </a:fld>
             <a:endParaRPr lang="en-US"/>
           </a:p>
@@ -469,7 +553,7 @@
 </p:notes>
 </file>
 
-<file path=ppt/notesSlides/notesSlide11.xml><?xml version="1.0" encoding="utf-8"?>
+<file path=ppt/notesSlides/notesSlide12.xml><?xml version="1.0" encoding="utf-8"?>
 <p:notes xmlns:a="http://schemas.openxmlformats.org/drawingml/2006/main" xmlns:r="http://schemas.openxmlformats.org/officeDocument/2006/relationships" xmlns:p="http://schemas.openxmlformats.org/presentationml/2006/main">
   <p:cSld>
     <p:spTree>
@@ -558,7 +642,7 @@
           <a:p>
             <a:fld id="{F7021451-1387-4CA6-816F-3879F97B5CBC}" type="slidenum">
               <a:rPr lang="en-US"/>
-              <a:t>11</a:t>
+              <a:t>12</a:t>
             </a:fld>
             <a:endParaRPr lang="en-US"/>
           </a:p>
@@ -577,7 +661,7 @@
 </p:notes>
 </file>
 
-<file path=ppt/notesSlides/notesSlide12.xml><?xml version="1.0" encoding="utf-8"?>
+<file path=ppt/notesSlides/notesSlide13.xml><?xml version="1.0" encoding="utf-8"?>
 <p:notes xmlns:a="http://schemas.openxmlformats.org/drawingml/2006/main" xmlns:r="http://schemas.openxmlformats.org/officeDocument/2006/relationships" xmlns:p="http://schemas.openxmlformats.org/presentationml/2006/main">
   <p:cSld>
     <p:spTree>
@@ -666,7 +750,7 @@
           <a:p>
             <a:fld id="{F7021451-1387-4CA6-816F-3879F97B5CBC}" type="slidenum">
               <a:rPr lang="en-US"/>
-              <a:t>12</a:t>
+              <a:t>13</a:t>
             </a:fld>
             <a:endParaRPr lang="en-US"/>
           </a:p>
@@ -685,7 +769,7 @@
 </p:notes>
 </file>
 
-<file path=ppt/notesSlides/notesSlide13.xml><?xml version="1.0" encoding="utf-8"?>
+<file path=ppt/notesSlides/notesSlide14.xml><?xml version="1.0" encoding="utf-8"?>
 <p:notes xmlns:a="http://schemas.openxmlformats.org/drawingml/2006/main" xmlns:r="http://schemas.openxmlformats.org/officeDocument/2006/relationships" xmlns:p="http://schemas.openxmlformats.org/presentationml/2006/main">
   <p:cSld>
     <p:spTree>
@@ -750,7 +834,7 @@
           <a:p>
             <a:fld id="{F7021451-1387-4CA6-816F-3879F97B5CBC}" type="slidenum">
               <a:rPr lang="en-US"/>
-              <a:t>13</a:t>
+              <a:t>14</a:t>
             </a:fld>
             <a:endParaRPr lang="en-US"/>
           </a:p>
@@ -769,7 +853,7 @@
 </p:notes>
 </file>
 
-<file path=ppt/notesSlides/notesSlide14.xml><?xml version="1.0" encoding="utf-8"?>
+<file path=ppt/notesSlides/notesSlide15.xml><?xml version="1.0" encoding="utf-8"?>
 <p:notes xmlns:a="http://schemas.openxmlformats.org/drawingml/2006/main" xmlns:r="http://schemas.openxmlformats.org/officeDocument/2006/relationships" xmlns:p="http://schemas.openxmlformats.org/presentationml/2006/main">
   <p:cSld>
     <p:spTree>
@@ -858,7 +942,7 @@
           <a:p>
             <a:fld id="{F7021451-1387-4CA6-816F-3879F97B5CBC}" type="slidenum">
               <a:rPr lang="en-US"/>
-              <a:t>14</a:t>
+              <a:t>15</a:t>
             </a:fld>
             <a:endParaRPr lang="en-US"/>
           </a:p>
@@ -877,7 +961,7 @@
 </p:notes>
 </file>
 
-<file path=ppt/notesSlides/notesSlide15.xml><?xml version="1.0" encoding="utf-8"?>
+<file path=ppt/notesSlides/notesSlide16.xml><?xml version="1.0" encoding="utf-8"?>
 <p:notes xmlns:a="http://schemas.openxmlformats.org/drawingml/2006/main" xmlns:r="http://schemas.openxmlformats.org/officeDocument/2006/relationships" xmlns:p="http://schemas.openxmlformats.org/presentationml/2006/main">
   <p:cSld>
     <p:spTree>
@@ -966,7 +1050,7 @@
           <a:p>
             <a:fld id="{F7021451-1387-4CA6-816F-3879F97B5CBC}" type="slidenum">
               <a:rPr lang="en-US"/>
-              <a:t>15</a:t>
+              <a:t>16</a:t>
             </a:fld>
             <a:endParaRPr lang="en-US"/>
           </a:p>
@@ -985,7 +1069,7 @@
 </p:notes>
 </file>
 
-<file path=ppt/notesSlides/notesSlide16.xml><?xml version="1.0" encoding="utf-8"?>
+<file path=ppt/notesSlides/notesSlide17.xml><?xml version="1.0" encoding="utf-8"?>
 <p:notes xmlns:a="http://schemas.openxmlformats.org/drawingml/2006/main" xmlns:r="http://schemas.openxmlformats.org/officeDocument/2006/relationships" xmlns:p="http://schemas.openxmlformats.org/presentationml/2006/main">
   <p:cSld>
     <p:spTree>
@@ -1074,7 +1158,7 @@
           <a:p>
             <a:fld id="{F7021451-1387-4CA6-816F-3879F97B5CBC}" type="slidenum">
               <a:rPr lang="en-US"/>
-              <a:t>16</a:t>
+              <a:t>17</a:t>
             </a:fld>
             <a:endParaRPr lang="en-US"/>
           </a:p>
@@ -1084,114 +1168,6 @@
     <p:extLst>
       <p:ext uri="{BB962C8B-B14F-4D97-AF65-F5344CB8AC3E}">
         <p14:creationId xmlns:p14="http://schemas.microsoft.com/office/powerpoint/2010/main" val="2478105440"/>
-      </p:ext>
-    </p:extLst>
-  </p:cSld>
-  <p:clrMapOvr>
-    <a:masterClrMapping/>
-  </p:clrMapOvr>
-</p:notes>
-</file>
-
-<file path=ppt/notesSlides/notesSlide17.xml><?xml version="1.0" encoding="utf-8"?>
-<p:notes xmlns:a="http://schemas.openxmlformats.org/drawingml/2006/main" xmlns:r="http://schemas.openxmlformats.org/officeDocument/2006/relationships" xmlns:p="http://schemas.openxmlformats.org/presentationml/2006/main">
-  <p:cSld>
-    <p:spTree>
-      <p:nvGrpSpPr>
-        <p:cNvPr id="1" name="">
-          <a:extLst>
-            <a:ext uri="{FF2B5EF4-FFF2-40B4-BE49-F238E27FC236}">
-              <a16:creationId xmlns:a16="http://schemas.microsoft.com/office/drawing/2014/main" id="{63712C30-82C5-71ED-C888-8B7C6D9F5909}"/>
-            </a:ext>
-          </a:extLst>
-        </p:cNvPr>
-        <p:cNvGrpSpPr/>
-        <p:nvPr/>
-      </p:nvGrpSpPr>
-      <p:grpSpPr>
-        <a:xfrm>
-          <a:off x="0" y="0"/>
-          <a:ext cx="0" cy="0"/>
-          <a:chOff x="0" y="0"/>
-          <a:chExt cx="0" cy="0"/>
-        </a:xfrm>
-      </p:grpSpPr>
-      <p:sp>
-        <p:nvSpPr>
-          <p:cNvPr id="2" name="Slide Image Placeholder 1">
-            <a:extLst>
-              <a:ext uri="{FF2B5EF4-FFF2-40B4-BE49-F238E27FC236}">
-                <a16:creationId xmlns:a16="http://schemas.microsoft.com/office/drawing/2014/main" id="{54A34F9E-8D50-DE92-6735-7B08A11A1386}"/>
-              </a:ext>
-            </a:extLst>
-          </p:cNvPr>
-          <p:cNvSpPr>
-            <a:spLocks noGrp="1" noRot="1" noChangeAspect="1"/>
-          </p:cNvSpPr>
-          <p:nvPr>
-            <p:ph type="sldImg"/>
-          </p:nvPr>
-        </p:nvSpPr>
-        <p:spPr/>
-      </p:sp>
-      <p:sp>
-        <p:nvSpPr>
-          <p:cNvPr id="3" name="Notes Placeholder 2">
-            <a:extLst>
-              <a:ext uri="{FF2B5EF4-FFF2-40B4-BE49-F238E27FC236}">
-                <a16:creationId xmlns:a16="http://schemas.microsoft.com/office/drawing/2014/main" id="{CF400DBE-AD42-35B0-253D-E00D863D2CA1}"/>
-              </a:ext>
-            </a:extLst>
-          </p:cNvPr>
-          <p:cNvSpPr>
-            <a:spLocks noGrp="1"/>
-          </p:cNvSpPr>
-          <p:nvPr>
-            <p:ph type="body" idx="1"/>
-          </p:nvPr>
-        </p:nvSpPr>
-        <p:spPr/>
-        <p:txBody>
-          <a:bodyPr/>
-          <a:lstStyle/>
-          <a:p>
-            <a:endParaRPr lang="en-US" dirty="0"/>
-          </a:p>
-        </p:txBody>
-      </p:sp>
-      <p:sp>
-        <p:nvSpPr>
-          <p:cNvPr id="4" name="Slide Number Placeholder 3">
-            <a:extLst>
-              <a:ext uri="{FF2B5EF4-FFF2-40B4-BE49-F238E27FC236}">
-                <a16:creationId xmlns:a16="http://schemas.microsoft.com/office/drawing/2014/main" id="{694421AD-47C0-5937-6EFF-5EAE1F3CD317}"/>
-              </a:ext>
-            </a:extLst>
-          </p:cNvPr>
-          <p:cNvSpPr>
-            <a:spLocks noGrp="1"/>
-          </p:cNvSpPr>
-          <p:nvPr>
-            <p:ph type="sldNum" sz="quarter" idx="10"/>
-          </p:nvPr>
-        </p:nvSpPr>
-        <p:spPr/>
-        <p:txBody>
-          <a:bodyPr/>
-          <a:lstStyle/>
-          <a:p>
-            <a:fld id="{F7021451-1387-4CA6-816F-3879F97B5CBC}" type="slidenum">
-              <a:rPr lang="en-US"/>
-              <a:t>17</a:t>
-            </a:fld>
-            <a:endParaRPr lang="en-US"/>
-          </a:p>
-        </p:txBody>
-      </p:sp>
-    </p:spTree>
-    <p:extLst>
-      <p:ext uri="{BB962C8B-B14F-4D97-AF65-F5344CB8AC3E}">
-        <p14:creationId xmlns:p14="http://schemas.microsoft.com/office/powerpoint/2010/main" val="2203310796"/>
       </p:ext>
     </p:extLst>
   </p:cSld>
@@ -1938,7 +1914,13 @@
   <p:cSld>
     <p:spTree>
       <p:nvGrpSpPr>
-        <p:cNvPr id="1" name=""/>
+        <p:cNvPr id="1" name="">
+          <a:extLst>
+            <a:ext uri="{FF2B5EF4-FFF2-40B4-BE49-F238E27FC236}">
+              <a16:creationId xmlns:a16="http://schemas.microsoft.com/office/drawing/2014/main" id="{AA20518B-57FC-2F73-5393-5F30BBDC24E6}"/>
+            </a:ext>
+          </a:extLst>
+        </p:cNvPr>
         <p:cNvGrpSpPr/>
         <p:nvPr/>
       </p:nvGrpSpPr>
@@ -1952,7 +1934,13 @@
       </p:grpSpPr>
       <p:sp>
         <p:nvSpPr>
-          <p:cNvPr id="2" name="Slide Image Placeholder 1"/>
+          <p:cNvPr id="2" name="Slide Image Placeholder 1">
+            <a:extLst>
+              <a:ext uri="{FF2B5EF4-FFF2-40B4-BE49-F238E27FC236}">
+                <a16:creationId xmlns:a16="http://schemas.microsoft.com/office/drawing/2014/main" id="{7E2DA298-3866-5F01-911D-C7492D52FA00}"/>
+              </a:ext>
+            </a:extLst>
+          </p:cNvPr>
           <p:cNvSpPr>
             <a:spLocks noGrp="1" noRot="1" noChangeAspect="1"/>
           </p:cNvSpPr>
@@ -1964,7 +1952,13 @@
       </p:sp>
       <p:sp>
         <p:nvSpPr>
-          <p:cNvPr id="3" name="Notes Placeholder 2"/>
+          <p:cNvPr id="3" name="Notes Placeholder 2">
+            <a:extLst>
+              <a:ext uri="{FF2B5EF4-FFF2-40B4-BE49-F238E27FC236}">
+                <a16:creationId xmlns:a16="http://schemas.microsoft.com/office/drawing/2014/main" id="{8CE8B32C-F899-F80B-3A2A-4BEFB578B61D}"/>
+              </a:ext>
+            </a:extLst>
+          </p:cNvPr>
           <p:cNvSpPr>
             <a:spLocks noGrp="1"/>
           </p:cNvSpPr>
@@ -1983,7 +1977,13 @@
       </p:sp>
       <p:sp>
         <p:nvSpPr>
-          <p:cNvPr id="4" name="Slide Number Placeholder 3"/>
+          <p:cNvPr id="4" name="Slide Number Placeholder 3">
+            <a:extLst>
+              <a:ext uri="{FF2B5EF4-FFF2-40B4-BE49-F238E27FC236}">
+                <a16:creationId xmlns:a16="http://schemas.microsoft.com/office/drawing/2014/main" id="{8543BB33-E636-CBC2-4B07-C93AFE89903C}"/>
+              </a:ext>
+            </a:extLst>
+          </p:cNvPr>
           <p:cNvSpPr>
             <a:spLocks noGrp="1"/>
           </p:cNvSpPr>
@@ -2007,7 +2007,7 @@
     </p:spTree>
     <p:extLst>
       <p:ext uri="{BB962C8B-B14F-4D97-AF65-F5344CB8AC3E}">
-        <p14:creationId xmlns:p14="http://schemas.microsoft.com/office/powerpoint/2010/main" val="1024086991"/>
+        <p14:creationId xmlns:p14="http://schemas.microsoft.com/office/powerpoint/2010/main" val="1904604828"/>
       </p:ext>
     </p:extLst>
   </p:cSld>
@@ -2092,7 +2092,7 @@
           </a:prstGeom>
           <a:extLst>
             <a:ext uri="{C572A759-6A51-4108-AA02-DFA0A04FC94B}">
-              <ma14:wrappingTextBoxFlag xmlns="" xmlns:ma14="http://schemas.microsoft.com/office/mac/drawingml/2011/main" val="0"/>
+              <ma14:wrappingTextBoxFlag xmlns:ma14="http://schemas.microsoft.com/office/mac/drawingml/2011/main" xmlns="" val="0"/>
             </a:ext>
           </a:extLst>
         </p:spPr>
@@ -2173,7 +2173,7 @@
           </a:prstGeom>
           <a:extLst>
             <a:ext uri="{C572A759-6A51-4108-AA02-DFA0A04FC94B}">
-              <ma14:wrappingTextBoxFlag xmlns="" xmlns:ma14="http://schemas.microsoft.com/office/mac/drawingml/2011/main" val="0"/>
+              <ma14:wrappingTextBoxFlag xmlns:ma14="http://schemas.microsoft.com/office/mac/drawingml/2011/main" xmlns="" val="0"/>
             </a:ext>
           </a:extLst>
         </p:spPr>
@@ -2251,7 +2251,7 @@
           </a:prstGeom>
           <a:extLst>
             <a:ext uri="{C572A759-6A51-4108-AA02-DFA0A04FC94B}">
-              <ma14:wrappingTextBoxFlag xmlns="" xmlns:ma14="http://schemas.microsoft.com/office/mac/drawingml/2011/main" val="0"/>
+              <ma14:wrappingTextBoxFlag xmlns:ma14="http://schemas.microsoft.com/office/mac/drawingml/2011/main" xmlns="" val="0"/>
             </a:ext>
           </a:extLst>
         </p:spPr>
@@ -2728,6 +2728,136 @@
 
 <file path=ppt/slides/slide10.xml><?xml version="1.0" encoding="utf-8"?>
 <p:sld xmlns:a="http://schemas.openxmlformats.org/drawingml/2006/main" xmlns:r="http://schemas.openxmlformats.org/officeDocument/2006/relationships" xmlns:p="http://schemas.openxmlformats.org/presentationml/2006/main">
+  <p:cSld name="Slide 3">
+    <p:spTree>
+      <p:nvGrpSpPr>
+        <p:cNvPr id="1" name=""/>
+        <p:cNvGrpSpPr/>
+        <p:nvPr/>
+      </p:nvGrpSpPr>
+      <p:grpSpPr>
+        <a:xfrm>
+          <a:off x="0" y="0"/>
+          <a:ext cx="0" cy="0"/>
+          <a:chOff x="0" y="0"/>
+          <a:chExt cx="0" cy="0"/>
+        </a:xfrm>
+      </p:grpSpPr>
+      <p:sp>
+        <p:nvSpPr>
+          <p:cNvPr id="3" name="Text 1"/>
+          <p:cNvSpPr txBox="1"/>
+          <p:nvPr/>
+        </p:nvSpPr>
+        <p:spPr>
+          <a:xfrm>
+            <a:off x="655320" y="274320"/>
+            <a:ext cx="10881360" cy="822960"/>
+          </a:xfrm>
+          <a:prstGeom prst="rect">
+            <a:avLst/>
+          </a:prstGeom>
+          <a:noFill/>
+          <a:ln/>
+        </p:spPr>
+        <p:txBody>
+          <a:bodyPr wrap="square" lIns="0" tIns="0" rIns="0" bIns="0" rtlCol="0" anchor="t"/>
+          <a:lstStyle/>
+          <a:p>
+            <a:pPr marL="0" indent="0">
+              <a:buNone/>
+            </a:pPr>
+            <a:endParaRPr lang="en-US" sz="3400" dirty="0"/>
+          </a:p>
+        </p:txBody>
+      </p:sp>
+      <p:pic>
+        <p:nvPicPr>
+          <p:cNvPr id="5" name="Image 0" descr="/tmp/claude-0/-home-claude/3e2c67bf-185e-57a7-b169-f73d7abaeeba/scratchpad/flow/deck2/holst.png"/>
+          <p:cNvPicPr>
+            <a:picLocks noChangeAspect="1"/>
+          </p:cNvPicPr>
+          <p:nvPr/>
+        </p:nvPicPr>
+        <p:blipFill>
+          <a:blip r:embed="rId3"/>
+          <a:stretch>
+            <a:fillRect/>
+          </a:stretch>
+        </p:blipFill>
+        <p:spPr>
+          <a:xfrm>
+            <a:off x="0" y="0"/>
+            <a:ext cx="12192000" cy="5568950"/>
+          </a:xfrm>
+          <a:prstGeom prst="rect">
+            <a:avLst/>
+          </a:prstGeom>
+        </p:spPr>
+      </p:pic>
+      <p:sp>
+        <p:nvSpPr>
+          <p:cNvPr id="4" name="TextBox 3">
+            <a:extLst>
+              <a:ext uri="{FF2B5EF4-FFF2-40B4-BE49-F238E27FC236}">
+                <a16:creationId xmlns:a16="http://schemas.microsoft.com/office/drawing/2014/main" id="{F740E426-526A-F00C-6B71-8372EEB4D5EA}"/>
+              </a:ext>
+            </a:extLst>
+          </p:cNvPr>
+          <p:cNvSpPr txBox="1"/>
+          <p:nvPr/>
+        </p:nvSpPr>
+        <p:spPr>
+          <a:xfrm>
+            <a:off x="1" y="5529559"/>
+            <a:ext cx="12191999" cy="1323439"/>
+          </a:xfrm>
+          <a:prstGeom prst="rect">
+            <a:avLst/>
+          </a:prstGeom>
+          <a:noFill/>
+        </p:spPr>
+        <p:txBody>
+          <a:bodyPr wrap="square">
+            <a:spAutoFit/>
+          </a:bodyPr>
+          <a:lstStyle/>
+          <a:p>
+            <a:pPr marL="0" indent="0" algn="ctr">
+              <a:buNone/>
+            </a:pPr>
+            <a:r>
+              <a:rPr lang="ru-RU" sz="8000">
+                <a:solidFill>
+                  <a:srgbClr val="0B1733"/>
+                </a:solidFill>
+                <a:latin typeface="VTB Group UI Semi Bold" pitchFamily="34" charset="0"/>
+              </a:rPr>
+              <a:t>Аналог</a:t>
+            </a:r>
+            <a:r>
+              <a:rPr lang="en-US" sz="8000">
+                <a:solidFill>
+                  <a:srgbClr val="0B1733"/>
+                </a:solidFill>
+                <a:latin typeface="VTB Group UI Semi Bold" pitchFamily="34" charset="0"/>
+              </a:rPr>
+              <a:t>#1 Holst</a:t>
+            </a:r>
+            <a:endParaRPr lang="en-US" sz="8000" dirty="0"/>
+          </a:p>
+        </p:txBody>
+      </p:sp>
+    </p:spTree>
+  </p:cSld>
+  <p:clrMapOvr>
+    <a:masterClrMapping/>
+  </p:clrMapOvr>
+</p:sld>
+</file>
+
+<file path=ppt/slides/slide11.xml><?xml version="1.0" encoding="utf-8"?>
+<p:sld xmlns:a="http://schemas.openxmlformats.org/drawingml/2006/main" xmlns:r="http://schemas.openxmlformats.org/officeDocument/2006/relationships" xmlns:p="http://schemas.openxmlformats.org/presentationml/2006/main">
   <p:cSld>
     <p:spTree>
       <p:nvGrpSpPr>
@@ -2879,7 +3009,7 @@
 </p:sld>
 </file>
 
-<file path=ppt/slides/slide11.xml><?xml version="1.0" encoding="utf-8"?>
+<file path=ppt/slides/slide12.xml><?xml version="1.0" encoding="utf-8"?>
 <p:sld xmlns:a="http://schemas.openxmlformats.org/drawingml/2006/main" xmlns:r="http://schemas.openxmlformats.org/officeDocument/2006/relationships" xmlns:p="http://schemas.openxmlformats.org/presentationml/2006/main">
   <p:cSld>
     <p:spTree>
@@ -3705,7 +3835,7 @@
 </p:sld>
 </file>
 
-<file path=ppt/slides/slide12.xml><?xml version="1.0" encoding="utf-8"?>
+<file path=ppt/slides/slide13.xml><?xml version="1.0" encoding="utf-8"?>
 <p:sld xmlns:a="http://schemas.openxmlformats.org/drawingml/2006/main" xmlns:r="http://schemas.openxmlformats.org/officeDocument/2006/relationships" xmlns:p="http://schemas.openxmlformats.org/presentationml/2006/main">
   <p:cSld>
     <p:spTree>
@@ -3815,7 +3945,7 @@
 </p:sld>
 </file>
 
-<file path=ppt/slides/slide13.xml><?xml version="1.0" encoding="utf-8"?>
+<file path=ppt/slides/slide14.xml><?xml version="1.0" encoding="utf-8"?>
 <p:sld xmlns:a="http://schemas.openxmlformats.org/drawingml/2006/main" xmlns:r="http://schemas.openxmlformats.org/officeDocument/2006/relationships" xmlns:p="http://schemas.openxmlformats.org/presentationml/2006/main">
   <p:cSld name="Slide 6">
     <p:spTree>
@@ -3965,7 +4095,7 @@
 </p:sld>
 </file>
 
-<file path=ppt/slides/slide14.xml><?xml version="1.0" encoding="utf-8"?>
+<file path=ppt/slides/slide15.xml><?xml version="1.0" encoding="utf-8"?>
 <p:sld xmlns:a="http://schemas.openxmlformats.org/drawingml/2006/main" xmlns:r="http://schemas.openxmlformats.org/officeDocument/2006/relationships" xmlns:p="http://schemas.openxmlformats.org/presentationml/2006/main">
   <p:cSld>
     <p:spTree>
@@ -4132,7 +4262,7 @@
 </p:sld>
 </file>
 
-<file path=ppt/slides/slide15.xml><?xml version="1.0" encoding="utf-8"?>
+<file path=ppt/slides/slide16.xml><?xml version="1.0" encoding="utf-8"?>
 <p:sld xmlns:a="http://schemas.openxmlformats.org/drawingml/2006/main" xmlns:r="http://schemas.openxmlformats.org/officeDocument/2006/relationships" xmlns:p="http://schemas.openxmlformats.org/presentationml/2006/main">
   <p:cSld>
     <p:spTree>
@@ -4321,7 +4451,7 @@
 </p:sld>
 </file>
 
-<file path=ppt/slides/slide16.xml><?xml version="1.0" encoding="utf-8"?>
+<file path=ppt/slides/slide17.xml><?xml version="1.0" encoding="utf-8"?>
 <p:sld xmlns:a="http://schemas.openxmlformats.org/drawingml/2006/main" xmlns:r="http://schemas.openxmlformats.org/officeDocument/2006/relationships" xmlns:p="http://schemas.openxmlformats.org/presentationml/2006/main">
   <p:cSld>
     <p:spTree>
@@ -4403,7 +4533,7 @@
         <p:spPr>
           <a:xfrm>
             <a:off x="706543" y="1590905"/>
-            <a:ext cx="10916969" cy="3693319"/>
+            <a:ext cx="10916969" cy="4247317"/>
           </a:xfrm>
           <a:prstGeom prst="rect">
             <a:avLst/>
@@ -4545,7 +4675,7 @@
                 </a:solidFill>
                 <a:latin typeface="VTB Group UI Book" panose="020B0503040504020204" pitchFamily="34" charset="-52"/>
               </a:rPr>
-              <a:t>Описание функциональных требований</a:t>
+              <a:t>Описание функциональных требований </a:t>
             </a:r>
           </a:p>
           <a:p>
@@ -4740,7 +4870,9 @@
               </a:rPr>
               <a:t>)</a:t>
             </a:r>
-            <a:br>
+          </a:p>
+          <a:p>
+            <a:r>
               <a:rPr lang="ru-RU">
                 <a:solidFill>
                   <a:schemeClr val="tx1">
@@ -4750,9 +4882,10 @@
                 </a:solidFill>
                 <a:latin typeface="VTB Group UI Book" panose="020B0503040504020204" pitchFamily="34" charset="-52"/>
               </a:rPr>
-            </a:br>
-            <a:r>
-              <a:rPr lang="ru-RU">
+              <a:t>       </a:t>
+            </a:r>
+            <a:r>
+              <a:rPr lang="en-US">
                 <a:solidFill>
                   <a:schemeClr val="tx1">
                     <a:lumMod val="95000"/>
@@ -4761,10 +4894,10 @@
                 </a:solidFill>
                 <a:latin typeface="VTB Group UI Book" panose="020B0503040504020204" pitchFamily="34" charset="-52"/>
               </a:rPr>
-              <a:t>       2.3) Макетирование </a:t>
-            </a:r>
-            <a:r>
-              <a:rPr lang="en-US">
+              <a:t>2.</a:t>
+            </a:r>
+            <a:r>
+              <a:rPr lang="ru-RU">
                 <a:solidFill>
                   <a:schemeClr val="tx1">
                     <a:lumMod val="95000"/>
@@ -4773,7 +4906,113 @@
                 </a:solidFill>
                 <a:latin typeface="VTB Group UI Book" panose="020B0503040504020204" pitchFamily="34" charset="-52"/>
               </a:rPr>
+              <a:t>3</a:t>
+            </a:r>
+            <a:r>
+              <a:rPr lang="en-US">
+                <a:solidFill>
+                  <a:schemeClr val="tx1">
+                    <a:lumMod val="95000"/>
+                    <a:lumOff val="5000"/>
+                  </a:schemeClr>
+                </a:solidFill>
+                <a:latin typeface="VTB Group UI Book" panose="020B0503040504020204" pitchFamily="34" charset="-52"/>
+              </a:rPr>
+              <a:t>) </a:t>
+            </a:r>
+            <a:r>
+              <a:rPr lang="ru-RU">
+                <a:solidFill>
+                  <a:schemeClr val="tx1">
+                    <a:lumMod val="95000"/>
+                    <a:lumOff val="5000"/>
+                  </a:schemeClr>
+                </a:solidFill>
+                <a:latin typeface="VTB Group UI Book" panose="020B0503040504020204" pitchFamily="34" charset="-52"/>
+              </a:rPr>
+              <a:t>Построение </a:t>
+            </a:r>
+            <a:r>
+              <a:rPr lang="en-US">
+                <a:solidFill>
+                  <a:schemeClr val="tx1">
+                    <a:lumMod val="95000"/>
+                    <a:lumOff val="5000"/>
+                  </a:schemeClr>
+                </a:solidFill>
+                <a:latin typeface="VTB Group UI Book" panose="020B0503040504020204" pitchFamily="34" charset="-52"/>
+              </a:rPr>
+              <a:t>BPMN </a:t>
+            </a:r>
+            <a:r>
+              <a:rPr lang="ru-RU">
+                <a:solidFill>
+                  <a:schemeClr val="tx1">
+                    <a:lumMod val="95000"/>
+                    <a:lumOff val="5000"/>
+                  </a:schemeClr>
+                </a:solidFill>
+                <a:latin typeface="VTB Group UI Book" panose="020B0503040504020204" pitchFamily="34" charset="-52"/>
+              </a:rPr>
+              <a:t>диаграммы пользовательского пути.</a:t>
+            </a:r>
+            <a:br>
+              <a:rPr lang="ru-RU">
+                <a:solidFill>
+                  <a:schemeClr val="tx1">
+                    <a:lumMod val="95000"/>
+                    <a:lumOff val="5000"/>
+                  </a:schemeClr>
+                </a:solidFill>
+                <a:latin typeface="VTB Group UI Book" panose="020B0503040504020204" pitchFamily="34" charset="-52"/>
+              </a:rPr>
+            </a:br>
+            <a:r>
+              <a:rPr lang="ru-RU">
+                <a:solidFill>
+                  <a:schemeClr val="tx1">
+                    <a:lumMod val="95000"/>
+                    <a:lumOff val="5000"/>
+                  </a:schemeClr>
+                </a:solidFill>
+                <a:latin typeface="VTB Group UI Book" panose="020B0503040504020204" pitchFamily="34" charset="-52"/>
+              </a:rPr>
+              <a:t>       2.4) Макетирование </a:t>
+            </a:r>
+            <a:r>
+              <a:rPr lang="en-US">
+                <a:solidFill>
+                  <a:schemeClr val="tx1">
+                    <a:lumMod val="95000"/>
+                    <a:lumOff val="5000"/>
+                  </a:schemeClr>
+                </a:solidFill>
+                <a:latin typeface="VTB Group UI Book" panose="020B0503040504020204" pitchFamily="34" charset="-52"/>
+              </a:rPr>
               <a:t>User Flow</a:t>
+            </a:r>
+            <a:br>
+              <a:rPr lang="en-US">
+                <a:solidFill>
+                  <a:schemeClr val="tx1">
+                    <a:lumMod val="95000"/>
+                    <a:lumOff val="5000"/>
+                  </a:schemeClr>
+                </a:solidFill>
+                <a:latin typeface="VTB Group UI Book" panose="020B0503040504020204" pitchFamily="34" charset="-52"/>
+              </a:rPr>
+            </a:br>
+            <a:r>
+              <a:rPr lang="en-US">
+                <a:solidFill>
+                  <a:schemeClr val="tx1">
+                    <a:lumMod val="95000"/>
+                    <a:lumOff val="5000"/>
+                  </a:schemeClr>
+                </a:solidFill>
+                <a:latin typeface="VTB Group UI Book" panose="020B0503040504020204" pitchFamily="34" charset="-52"/>
+              </a:rPr>
+              <a:t>       </a:t>
             </a:r>
             <a:endParaRPr lang="ru-RU">
               <a:solidFill>
@@ -4987,469 +5226,6 @@
     <p:extLst>
       <p:ext uri="{BB962C8B-B14F-4D97-AF65-F5344CB8AC3E}">
         <p14:creationId xmlns:p14="http://schemas.microsoft.com/office/powerpoint/2010/main" val="3753208074"/>
-      </p:ext>
-    </p:extLst>
-  </p:cSld>
-  <p:clrMapOvr>
-    <a:masterClrMapping/>
-  </p:clrMapOvr>
-</p:sld>
-</file>
-
-<file path=ppt/slides/slide17.xml><?xml version="1.0" encoding="utf-8"?>
-<p:sld xmlns:a="http://schemas.openxmlformats.org/drawingml/2006/main" xmlns:r="http://schemas.openxmlformats.org/officeDocument/2006/relationships" xmlns:p="http://schemas.openxmlformats.org/presentationml/2006/main">
-  <p:cSld>
-    <p:spTree>
-      <p:nvGrpSpPr>
-        <p:cNvPr id="1" name="">
-          <a:extLst>
-            <a:ext uri="{FF2B5EF4-FFF2-40B4-BE49-F238E27FC236}">
-              <a16:creationId xmlns:a16="http://schemas.microsoft.com/office/drawing/2014/main" id="{9245AD0C-DE16-7845-93A2-10B69CD5E17B}"/>
-            </a:ext>
-          </a:extLst>
-        </p:cNvPr>
-        <p:cNvGrpSpPr/>
-        <p:nvPr/>
-      </p:nvGrpSpPr>
-      <p:grpSpPr>
-        <a:xfrm>
-          <a:off x="0" y="0"/>
-          <a:ext cx="0" cy="0"/>
-          <a:chOff x="0" y="0"/>
-          <a:chExt cx="0" cy="0"/>
-        </a:xfrm>
-      </p:grpSpPr>
-      <p:sp>
-        <p:nvSpPr>
-          <p:cNvPr id="5" name="TextBox 4">
-            <a:extLst>
-              <a:ext uri="{FF2B5EF4-FFF2-40B4-BE49-F238E27FC236}">
-                <a16:creationId xmlns:a16="http://schemas.microsoft.com/office/drawing/2014/main" id="{57550A58-FFC6-43B0-1AE1-7EE47A016410}"/>
-              </a:ext>
-            </a:extLst>
-          </p:cNvPr>
-          <p:cNvSpPr txBox="1"/>
-          <p:nvPr/>
-        </p:nvSpPr>
-        <p:spPr>
-          <a:xfrm>
-            <a:off x="534296" y="404705"/>
-            <a:ext cx="11261464" cy="830997"/>
-          </a:xfrm>
-          <a:prstGeom prst="rect">
-            <a:avLst/>
-          </a:prstGeom>
-          <a:noFill/>
-        </p:spPr>
-        <p:txBody>
-          <a:bodyPr wrap="square">
-            <a:spAutoFit/>
-          </a:bodyPr>
-          <a:lstStyle/>
-          <a:p>
-            <a:pPr algn="ctr"/>
-            <a:r>
-              <a:rPr lang="ru-RU" sz="4800">
-                <a:solidFill>
-                  <a:srgbClr val="0B1733"/>
-                </a:solidFill>
-                <a:latin typeface="VTB Group UI Semi Bold" pitchFamily="34" charset="0"/>
-                <a:ea typeface="VTB Group UI Semi Bold" pitchFamily="34" charset="-122"/>
-                <a:cs typeface="VTB Group UI Semi Bold" pitchFamily="34" charset="-120"/>
-              </a:rPr>
-              <a:t>Техническое Задание (ТЗ)</a:t>
-            </a:r>
-            <a:endParaRPr lang="ru-RU" sz="3200"/>
-          </a:p>
-        </p:txBody>
-      </p:sp>
-      <p:graphicFrame>
-        <p:nvGraphicFramePr>
-          <p:cNvPr id="2" name="Таблица 1">
-            <a:extLst>
-              <a:ext uri="{FF2B5EF4-FFF2-40B4-BE49-F238E27FC236}">
-                <a16:creationId xmlns:a16="http://schemas.microsoft.com/office/drawing/2014/main" id="{B36205F3-E636-C5C8-6F4F-599DB0F79BA1}"/>
-              </a:ext>
-            </a:extLst>
-          </p:cNvPr>
-          <p:cNvGraphicFramePr>
-            <a:graphicFrameLocks noGrp="1"/>
-          </p:cNvGraphicFramePr>
-          <p:nvPr>
-            <p:extLst>
-              <p:ext uri="{D42A27DB-BD31-4B8C-83A1-F6EECF244321}">
-                <p14:modId xmlns:p14="http://schemas.microsoft.com/office/powerpoint/2010/main" val="2325652521"/>
-              </p:ext>
-            </p:extLst>
-          </p:nvPr>
-        </p:nvGraphicFramePr>
-        <p:xfrm>
-          <a:off x="534295" y="1453313"/>
-          <a:ext cx="11261464" cy="2148473"/>
-        </p:xfrm>
-        <a:graphic>
-          <a:graphicData uri="http://schemas.openxmlformats.org/drawingml/2006/table">
-            <a:tbl>
-              <a:tblPr firstRow="1" bandRow="1">
-                <a:tableStyleId>{7E9639D4-E3E2-4D34-9284-5A2195B3D0D7}</a:tableStyleId>
-              </a:tblPr>
-              <a:tblGrid>
-                <a:gridCol w="5630732">
-                  <a:extLst>
-                    <a:ext uri="{9D8B030D-6E8A-4147-A177-3AD203B41FA5}">
-                      <a16:colId xmlns:a16="http://schemas.microsoft.com/office/drawing/2014/main" val="1316740329"/>
-                    </a:ext>
-                  </a:extLst>
-                </a:gridCol>
-                <a:gridCol w="5630732">
-                  <a:extLst>
-                    <a:ext uri="{9D8B030D-6E8A-4147-A177-3AD203B41FA5}">
-                      <a16:colId xmlns:a16="http://schemas.microsoft.com/office/drawing/2014/main" val="3952294350"/>
-                    </a:ext>
-                  </a:extLst>
-                </a:gridCol>
-              </a:tblGrid>
-              <a:tr h="481813">
-                <a:tc>
-                  <a:txBody>
-                    <a:bodyPr/>
-                    <a:lstStyle/>
-                    <a:p>
-                      <a:pPr algn="ctr"/>
-                      <a:r>
-                        <a:rPr lang="ru-RU">
-                          <a:latin typeface="VTB Group UI Semi Bold" panose="020B0603050504020204" pitchFamily="34" charset="-52"/>
-                        </a:rPr>
-                        <a:t>Этап</a:t>
-                      </a:r>
-                    </a:p>
-                  </a:txBody>
-                  <a:tcPr>
-                    <a:lnL w="12700" cap="flat" cmpd="sng" algn="ctr">
-                      <a:solidFill>
-                        <a:schemeClr val="tx1"/>
-                      </a:solidFill>
-                      <a:prstDash val="solid"/>
-                      <a:round/>
-                      <a:headEnd type="none" w="med" len="med"/>
-                      <a:tailEnd type="none" w="med" len="med"/>
-                    </a:lnL>
-                    <a:lnR w="12700" cap="flat" cmpd="sng" algn="ctr">
-                      <a:solidFill>
-                        <a:schemeClr val="tx1"/>
-                      </a:solidFill>
-                      <a:prstDash val="solid"/>
-                      <a:round/>
-                      <a:headEnd type="none" w="med" len="med"/>
-                      <a:tailEnd type="none" w="med" len="med"/>
-                    </a:lnR>
-                    <a:lnT w="12700" cap="flat" cmpd="sng" algn="ctr">
-                      <a:solidFill>
-                        <a:schemeClr val="tx1"/>
-                      </a:solidFill>
-                      <a:prstDash val="solid"/>
-                      <a:round/>
-                      <a:headEnd type="none" w="med" len="med"/>
-                      <a:tailEnd type="none" w="med" len="med"/>
-                    </a:lnT>
-                    <a:lnB w="12700" cap="flat" cmpd="sng" algn="ctr">
-                      <a:solidFill>
-                        <a:schemeClr val="tx1"/>
-                      </a:solidFill>
-                      <a:prstDash val="solid"/>
-                      <a:round/>
-                      <a:headEnd type="none" w="med" len="med"/>
-                      <a:tailEnd type="none" w="med" len="med"/>
-                    </a:lnB>
-                    <a:solidFill>
-                      <a:srgbClr val="0062FF"/>
-                    </a:solidFill>
-                  </a:tcPr>
-                </a:tc>
-                <a:tc>
-                  <a:txBody>
-                    <a:bodyPr/>
-                    <a:lstStyle/>
-                    <a:p>
-                      <a:pPr algn="ctr"/>
-                      <a:r>
-                        <a:rPr lang="ru-RU">
-                          <a:latin typeface="VTB Group UI Semi Bold" panose="020B0603050504020204" pitchFamily="34" charset="-52"/>
-                        </a:rPr>
-                        <a:t>Ориентировочный срок</a:t>
-                      </a:r>
-                    </a:p>
-                  </a:txBody>
-                  <a:tcPr>
-                    <a:lnL w="12700" cap="flat" cmpd="sng" algn="ctr">
-                      <a:solidFill>
-                        <a:schemeClr val="tx1"/>
-                      </a:solidFill>
-                      <a:prstDash val="solid"/>
-                      <a:round/>
-                      <a:headEnd type="none" w="med" len="med"/>
-                      <a:tailEnd type="none" w="med" len="med"/>
-                    </a:lnL>
-                    <a:lnR w="12700" cap="flat" cmpd="sng" algn="ctr">
-                      <a:solidFill>
-                        <a:schemeClr val="tx1"/>
-                      </a:solidFill>
-                      <a:prstDash val="solid"/>
-                      <a:round/>
-                      <a:headEnd type="none" w="med" len="med"/>
-                      <a:tailEnd type="none" w="med" len="med"/>
-                    </a:lnR>
-                    <a:lnT w="12700" cap="flat" cmpd="sng" algn="ctr">
-                      <a:solidFill>
-                        <a:schemeClr val="tx1"/>
-                      </a:solidFill>
-                      <a:prstDash val="solid"/>
-                      <a:round/>
-                      <a:headEnd type="none" w="med" len="med"/>
-                      <a:tailEnd type="none" w="med" len="med"/>
-                    </a:lnT>
-                    <a:lnB w="12700" cap="flat" cmpd="sng" algn="ctr">
-                      <a:solidFill>
-                        <a:schemeClr val="tx1"/>
-                      </a:solidFill>
-                      <a:prstDash val="solid"/>
-                      <a:round/>
-                      <a:headEnd type="none" w="med" len="med"/>
-                      <a:tailEnd type="none" w="med" len="med"/>
-                    </a:lnB>
-                    <a:solidFill>
-                      <a:srgbClr val="0062FF"/>
-                    </a:solidFill>
-                  </a:tcPr>
-                </a:tc>
-                <a:extLst>
-                  <a:ext uri="{0D108BD9-81ED-4DB2-BD59-A6C34878D82A}">
-                    <a16:rowId xmlns:a16="http://schemas.microsoft.com/office/drawing/2014/main" val="3901080250"/>
-                  </a:ext>
-                </a:extLst>
-              </a:tr>
-              <a:tr h="833330">
-                <a:tc>
-                  <a:txBody>
-                    <a:bodyPr/>
-                    <a:lstStyle/>
-                    <a:p>
-                      <a:pPr algn="l"/>
-                      <a:endParaRPr lang="ru-RU">
-                        <a:latin typeface="VTB Group UI Book" panose="020B0503040504020204" pitchFamily="34" charset="-52"/>
-                      </a:endParaRPr>
-                    </a:p>
-                  </a:txBody>
-                  <a:tcPr marL="182880" anchor="ctr">
-                    <a:lnL w="12700" cap="flat" cmpd="sng" algn="ctr">
-                      <a:solidFill>
-                        <a:schemeClr val="tx1"/>
-                      </a:solidFill>
-                      <a:prstDash val="solid"/>
-                      <a:round/>
-                      <a:headEnd type="none" w="med" len="med"/>
-                      <a:tailEnd type="none" w="med" len="med"/>
-                    </a:lnL>
-                    <a:lnR w="12700" cap="flat" cmpd="sng" algn="ctr">
-                      <a:solidFill>
-                        <a:schemeClr val="tx1"/>
-                      </a:solidFill>
-                      <a:prstDash val="solid"/>
-                      <a:round/>
-                      <a:headEnd type="none" w="med" len="med"/>
-                      <a:tailEnd type="none" w="med" len="med"/>
-                    </a:lnR>
-                    <a:lnT w="12700" cap="flat" cmpd="sng" algn="ctr">
-                      <a:solidFill>
-                        <a:schemeClr val="tx1"/>
-                      </a:solidFill>
-                      <a:prstDash val="solid"/>
-                      <a:round/>
-                      <a:headEnd type="none" w="med" len="med"/>
-                      <a:tailEnd type="none" w="med" len="med"/>
-                    </a:lnT>
-                    <a:lnB w="12700" cap="flat" cmpd="sng" algn="ctr">
-                      <a:solidFill>
-                        <a:schemeClr val="tx1"/>
-                      </a:solidFill>
-                      <a:prstDash val="solid"/>
-                      <a:round/>
-                      <a:headEnd type="none" w="med" len="med"/>
-                      <a:tailEnd type="none" w="med" len="med"/>
-                    </a:lnB>
-                  </a:tcPr>
-                </a:tc>
-                <a:tc>
-                  <a:txBody>
-                    <a:bodyPr/>
-                    <a:lstStyle/>
-                    <a:p>
-                      <a:pPr algn="ctr"/>
-                      <a:endParaRPr lang="ru-RU">
-                        <a:latin typeface="VTB Group UI Book" panose="020B0503040504020204" pitchFamily="34" charset="-52"/>
-                      </a:endParaRPr>
-                    </a:p>
-                  </a:txBody>
-                  <a:tcPr anchor="ctr">
-                    <a:lnL w="12700" cap="flat" cmpd="sng" algn="ctr">
-                      <a:solidFill>
-                        <a:schemeClr val="tx1"/>
-                      </a:solidFill>
-                      <a:prstDash val="solid"/>
-                      <a:round/>
-                      <a:headEnd type="none" w="med" len="med"/>
-                      <a:tailEnd type="none" w="med" len="med"/>
-                    </a:lnL>
-                    <a:lnR w="12700" cap="flat" cmpd="sng" algn="ctr">
-                      <a:solidFill>
-                        <a:schemeClr val="tx1"/>
-                      </a:solidFill>
-                      <a:prstDash val="solid"/>
-                      <a:round/>
-                      <a:headEnd type="none" w="med" len="med"/>
-                      <a:tailEnd type="none" w="med" len="med"/>
-                    </a:lnR>
-                    <a:lnT w="12700" cap="flat" cmpd="sng" algn="ctr">
-                      <a:solidFill>
-                        <a:schemeClr val="tx1"/>
-                      </a:solidFill>
-                      <a:prstDash val="solid"/>
-                      <a:round/>
-                      <a:headEnd type="none" w="med" len="med"/>
-                      <a:tailEnd type="none" w="med" len="med"/>
-                    </a:lnT>
-                    <a:lnB w="12700" cap="flat" cmpd="sng" algn="ctr">
-                      <a:solidFill>
-                        <a:schemeClr val="tx1"/>
-                      </a:solidFill>
-                      <a:prstDash val="solid"/>
-                      <a:round/>
-                      <a:headEnd type="none" w="med" len="med"/>
-                      <a:tailEnd type="none" w="med" len="med"/>
-                    </a:lnB>
-                  </a:tcPr>
-                </a:tc>
-                <a:extLst>
-                  <a:ext uri="{0D108BD9-81ED-4DB2-BD59-A6C34878D82A}">
-                    <a16:rowId xmlns:a16="http://schemas.microsoft.com/office/drawing/2014/main" val="1306159448"/>
-                  </a:ext>
-                </a:extLst>
-              </a:tr>
-              <a:tr h="833330">
-                <a:tc>
-                  <a:txBody>
-                    <a:bodyPr/>
-                    <a:lstStyle/>
-                    <a:p>
-                      <a:pPr algn="l"/>
-                      <a:endParaRPr lang="ru-RU">
-                        <a:latin typeface="VTB Group UI Book" panose="020B0503040504020204" pitchFamily="34" charset="-52"/>
-                      </a:endParaRPr>
-                    </a:p>
-                  </a:txBody>
-                  <a:tcPr marL="182880" anchor="ctr">
-                    <a:lnL w="12700" cap="flat" cmpd="sng" algn="ctr">
-                      <a:solidFill>
-                        <a:schemeClr val="tx1"/>
-                      </a:solidFill>
-                      <a:prstDash val="solid"/>
-                      <a:round/>
-                      <a:headEnd type="none" w="med" len="med"/>
-                      <a:tailEnd type="none" w="med" len="med"/>
-                    </a:lnL>
-                    <a:lnR w="12700" cap="flat" cmpd="sng" algn="ctr">
-                      <a:solidFill>
-                        <a:schemeClr val="tx1"/>
-                      </a:solidFill>
-                      <a:prstDash val="solid"/>
-                      <a:round/>
-                      <a:headEnd type="none" w="med" len="med"/>
-                      <a:tailEnd type="none" w="med" len="med"/>
-                    </a:lnR>
-                    <a:lnT w="12700" cap="flat" cmpd="sng" algn="ctr">
-                      <a:solidFill>
-                        <a:schemeClr val="tx1"/>
-                      </a:solidFill>
-                      <a:prstDash val="solid"/>
-                      <a:round/>
-                      <a:headEnd type="none" w="med" len="med"/>
-                      <a:tailEnd type="none" w="med" len="med"/>
-                    </a:lnT>
-                    <a:lnB w="12700" cap="flat" cmpd="sng" algn="ctr">
-                      <a:solidFill>
-                        <a:schemeClr val="tx1"/>
-                      </a:solidFill>
-                      <a:prstDash val="solid"/>
-                      <a:round/>
-                      <a:headEnd type="none" w="med" len="med"/>
-                      <a:tailEnd type="none" w="med" len="med"/>
-                    </a:lnB>
-                  </a:tcPr>
-                </a:tc>
-                <a:tc>
-                  <a:txBody>
-                    <a:bodyPr/>
-                    <a:lstStyle/>
-                    <a:p>
-                      <a:pPr algn="ctr"/>
-                      <a:endParaRPr lang="ru-RU">
-                        <a:latin typeface="VTB Group UI Book" panose="020B0503040504020204" pitchFamily="34" charset="-52"/>
-                      </a:endParaRPr>
-                    </a:p>
-                  </a:txBody>
-                  <a:tcPr anchor="ctr">
-                    <a:lnL w="12700" cap="flat" cmpd="sng" algn="ctr">
-                      <a:solidFill>
-                        <a:schemeClr val="tx1"/>
-                      </a:solidFill>
-                      <a:prstDash val="solid"/>
-                      <a:round/>
-                      <a:headEnd type="none" w="med" len="med"/>
-                      <a:tailEnd type="none" w="med" len="med"/>
-                    </a:lnL>
-                    <a:lnR w="12700" cap="flat" cmpd="sng" algn="ctr">
-                      <a:solidFill>
-                        <a:schemeClr val="tx1"/>
-                      </a:solidFill>
-                      <a:prstDash val="solid"/>
-                      <a:round/>
-                      <a:headEnd type="none" w="med" len="med"/>
-                      <a:tailEnd type="none" w="med" len="med"/>
-                    </a:lnR>
-                    <a:lnT w="12700" cap="flat" cmpd="sng" algn="ctr">
-                      <a:solidFill>
-                        <a:schemeClr val="tx1"/>
-                      </a:solidFill>
-                      <a:prstDash val="solid"/>
-                      <a:round/>
-                      <a:headEnd type="none" w="med" len="med"/>
-                      <a:tailEnd type="none" w="med" len="med"/>
-                    </a:lnT>
-                    <a:lnB w="12700" cap="flat" cmpd="sng" algn="ctr">
-                      <a:solidFill>
-                        <a:schemeClr val="tx1"/>
-                      </a:solidFill>
-                      <a:prstDash val="solid"/>
-                      <a:round/>
-                      <a:headEnd type="none" w="med" len="med"/>
-                      <a:tailEnd type="none" w="med" len="med"/>
-                    </a:lnB>
-                  </a:tcPr>
-                </a:tc>
-                <a:extLst>
-                  <a:ext uri="{0D108BD9-81ED-4DB2-BD59-A6C34878D82A}">
-                    <a16:rowId xmlns:a16="http://schemas.microsoft.com/office/drawing/2014/main" val="1610479619"/>
-                  </a:ext>
-                </a:extLst>
-              </a:tr>
-            </a:tbl>
-          </a:graphicData>
-        </a:graphic>
-      </p:graphicFrame>
-    </p:spTree>
-    <p:extLst>
-      <p:ext uri="{BB962C8B-B14F-4D97-AF65-F5344CB8AC3E}">
-        <p14:creationId xmlns:p14="http://schemas.microsoft.com/office/powerpoint/2010/main" val="73692638"/>
       </p:ext>
     </p:extLst>
   </p:cSld>
@@ -9521,67 +9297,6 @@
                 <a:solidFill>
                   <a:srgbClr val="0B1733"/>
                 </a:solidFill>
-                <a:highlight>
-                  <a:srgbClr val="FFFF00"/>
-                </a:highlight>
-                <a:latin typeface="VTB Group UI Book" panose="020B0503040504020204" pitchFamily="34" charset="-52"/>
-                <a:ea typeface="VTB Group UI Semi Bold" pitchFamily="34" charset="-122"/>
-                <a:cs typeface="VTB Group UI Semi Bold" pitchFamily="34" charset="-120"/>
-              </a:rPr>
-              <a:t>Необходимо ли предусмотреть копирование доски в личное пространство</a:t>
-            </a:r>
-            <a:r>
-              <a:rPr lang="en-US" sz="3400">
-                <a:solidFill>
-                  <a:srgbClr val="0B1733"/>
-                </a:solidFill>
-                <a:highlight>
-                  <a:srgbClr val="FFFF00"/>
-                </a:highlight>
-                <a:latin typeface="VTB Group UI Book" panose="020B0503040504020204" pitchFamily="34" charset="-52"/>
-                <a:ea typeface="VTB Group UI Semi Bold" pitchFamily="34" charset="-122"/>
-                <a:cs typeface="VTB Group UI Semi Bold" pitchFamily="34" charset="-120"/>
-              </a:rPr>
-              <a:t>? </a:t>
-            </a:r>
-            <a:r>
-              <a:rPr lang="ru-RU" sz="3400">
-                <a:solidFill>
-                  <a:srgbClr val="0B1733"/>
-                </a:solidFill>
-                <a:highlight>
-                  <a:srgbClr val="FFFF00"/>
-                </a:highlight>
-                <a:latin typeface="VTB Group UI Book" panose="020B0503040504020204" pitchFamily="34" charset="-52"/>
-                <a:ea typeface="VTB Group UI Semi Bold" pitchFamily="34" charset="-122"/>
-                <a:cs typeface="VTB Group UI Semi Bold" pitchFamily="34" charset="-120"/>
-              </a:rPr>
-              <a:t>Там уже есть возможность изменять личную копию.</a:t>
-            </a:r>
-            <a:endParaRPr lang="ru-RU" sz="3400">
-              <a:solidFill>
-                <a:schemeClr val="tx1">
-                  <a:lumMod val="95000"/>
-                  <a:lumOff val="5000"/>
-                </a:schemeClr>
-              </a:solidFill>
-              <a:highlight>
-                <a:srgbClr val="FFFF00"/>
-              </a:highlight>
-              <a:latin typeface="VTB Group UI Book" panose="020B0503040504020204" pitchFamily="34" charset="-52"/>
-              <a:ea typeface="VTB Group UI Semi Bold" pitchFamily="34" charset="-122"/>
-              <a:cs typeface="VTB Group UI Semi Bold" pitchFamily="34" charset="-120"/>
-            </a:endParaRPr>
-          </a:p>
-          <a:p>
-            <a:pPr marL="0" indent="0">
-              <a:buNone/>
-            </a:pPr>
-            <a:r>
-              <a:rPr lang="ru-RU" sz="3400">
-                <a:solidFill>
-                  <a:srgbClr val="0B1733"/>
-                </a:solidFill>
                 <a:latin typeface="VTB Group UI Book" panose="020B0503040504020204" pitchFamily="34" charset="-52"/>
                 <a:ea typeface="VTB Group UI Semi Bold" pitchFamily="34" charset="-122"/>
                 <a:cs typeface="VTB Group UI Semi Bold" pitchFamily="34" charset="-120"/>
@@ -10104,10 +9819,24 @@
 
 <file path=ppt/slides/slide9.xml><?xml version="1.0" encoding="utf-8"?>
 <p:sld xmlns:a="http://schemas.openxmlformats.org/drawingml/2006/main" xmlns:r="http://schemas.openxmlformats.org/officeDocument/2006/relationships" xmlns:p="http://schemas.openxmlformats.org/presentationml/2006/main">
-  <p:cSld name="Slide 3">
+  <p:cSld>
+    <p:bg>
+      <p:bgPr>
+        <a:solidFill>
+          <a:schemeClr val="bg1"/>
+        </a:solidFill>
+        <a:effectLst/>
+      </p:bgPr>
+    </p:bg>
     <p:spTree>
       <p:nvGrpSpPr>
-        <p:cNvPr id="1" name=""/>
+        <p:cNvPr id="1" name="">
+          <a:extLst>
+            <a:ext uri="{FF2B5EF4-FFF2-40B4-BE49-F238E27FC236}">
+              <a16:creationId xmlns:a16="http://schemas.microsoft.com/office/drawing/2014/main" id="{0D5C077F-8606-3483-C919-2C87AB524F59}"/>
+            </a:ext>
+          </a:extLst>
+        </p:cNvPr>
         <p:cNvGrpSpPr/>
         <p:nvPr/>
       </p:nvGrpSpPr>
@@ -10121,14 +9850,20 @@
       </p:grpSpPr>
       <p:sp>
         <p:nvSpPr>
-          <p:cNvPr id="3" name="Text 1"/>
+          <p:cNvPr id="3" name="Text 1">
+            <a:extLst>
+              <a:ext uri="{FF2B5EF4-FFF2-40B4-BE49-F238E27FC236}">
+                <a16:creationId xmlns:a16="http://schemas.microsoft.com/office/drawing/2014/main" id="{F4362A21-0B67-1AE9-C37A-CE1453730866}"/>
+              </a:ext>
+            </a:extLst>
+          </p:cNvPr>
           <p:cNvSpPr txBox="1"/>
           <p:nvPr/>
         </p:nvSpPr>
         <p:spPr>
           <a:xfrm>
-            <a:off x="655320" y="274320"/>
-            <a:ext cx="10881360" cy="822960"/>
+            <a:off x="534296" y="519362"/>
+            <a:ext cx="11261464" cy="5911918"/>
           </a:xfrm>
           <a:prstGeom prst="rect">
             <a:avLst/>
@@ -10143,13 +9878,289 @@
             <a:pPr marL="0" indent="0">
               <a:buNone/>
             </a:pPr>
-            <a:endParaRPr lang="en-US" sz="3400" dirty="0"/>
+            <a:r>
+              <a:rPr lang="ru-RU" sz="3400">
+                <a:solidFill>
+                  <a:srgbClr val="0B1733"/>
+                </a:solidFill>
+                <a:latin typeface="VTB Group UI Book" panose="020B0503040504020204" pitchFamily="34" charset="-52"/>
+                <a:ea typeface="VTB Group UI Semi Bold" pitchFamily="34" charset="-122"/>
+                <a:cs typeface="VTB Group UI Semi Bold" pitchFamily="34" charset="-120"/>
+              </a:rPr>
+              <a:t>	</a:t>
+            </a:r>
+            <a:r>
+              <a:rPr lang="ru-RU" sz="3400">
+                <a:solidFill>
+                  <a:srgbClr val="0B1733"/>
+                </a:solidFill>
+                <a:latin typeface="VTB Group UI Semi Bold" panose="020B0603050504020204" pitchFamily="34" charset="-52"/>
+                <a:ea typeface="VTB Group UI Semi Bold" pitchFamily="34" charset="-122"/>
+                <a:cs typeface="VTB Group UI Semi Bold" pitchFamily="34" charset="-120"/>
+              </a:rPr>
+              <a:t>Сценарий </a:t>
+            </a:r>
+          </a:p>
+          <a:p>
+            <a:pPr marL="0" indent="0">
+              <a:buNone/>
+            </a:pPr>
+            <a:r>
+              <a:rPr lang="ru-RU" sz="3400">
+                <a:solidFill>
+                  <a:srgbClr val="0B1733"/>
+                </a:solidFill>
+                <a:latin typeface="VTB Group UI Book" panose="020B0503040504020204" pitchFamily="34" charset="-52"/>
+                <a:ea typeface="VTB Group UI Semi Bold" pitchFamily="34" charset="-122"/>
+                <a:cs typeface="VTB Group UI Semi Bold" pitchFamily="34" charset="-120"/>
+              </a:rPr>
+              <a:t>  </a:t>
+            </a:r>
+          </a:p>
+          <a:p>
+            <a:pPr marL="0" indent="0">
+              <a:buNone/>
+            </a:pPr>
+            <a:r>
+              <a:rPr lang="ru-RU" sz="3400">
+                <a:solidFill>
+                  <a:srgbClr val="0B1733"/>
+                </a:solidFill>
+                <a:latin typeface="VTB Group UI Book" panose="020B0503040504020204" pitchFamily="34" charset="-52"/>
+                <a:ea typeface="VTB Group UI Semi Bold" pitchFamily="34" charset="-122"/>
+                <a:cs typeface="VTB Group UI Semi Bold" pitchFamily="34" charset="-120"/>
+              </a:rPr>
+              <a:t>На текущий момент в  </a:t>
+            </a:r>
+            <a:r>
+              <a:rPr lang="en-US" sz="3400">
+                <a:solidFill>
+                  <a:srgbClr val="0B1733"/>
+                </a:solidFill>
+                <a:latin typeface="VTB Group UI Book" panose="020B0503040504020204" pitchFamily="34" charset="-52"/>
+                <a:ea typeface="VTB Group UI Semi Bold" pitchFamily="34" charset="-122"/>
+                <a:cs typeface="VTB Group UI Semi Bold" pitchFamily="34" charset="-120"/>
+              </a:rPr>
+              <a:t>DION – </a:t>
+            </a:r>
+            <a:r>
+              <a:rPr lang="ru-RU" sz="3400">
+                <a:solidFill>
+                  <a:srgbClr val="0B1733"/>
+                </a:solidFill>
+                <a:latin typeface="VTB Group UI Book" panose="020B0503040504020204" pitchFamily="34" charset="-52"/>
+                <a:ea typeface="VTB Group UI Semi Bold" pitchFamily="34" charset="-122"/>
+                <a:cs typeface="VTB Group UI Semi Bold" pitchFamily="34" charset="-120"/>
+              </a:rPr>
+              <a:t>1853 конференции.</a:t>
+            </a:r>
+            <a:br>
+              <a:rPr lang="ru-RU" sz="3400">
+                <a:solidFill>
+                  <a:srgbClr val="0B1733"/>
+                </a:solidFill>
+                <a:latin typeface="VTB Group UI Book" panose="020B0503040504020204" pitchFamily="34" charset="-52"/>
+                <a:ea typeface="VTB Group UI Semi Bold" pitchFamily="34" charset="-122"/>
+                <a:cs typeface="VTB Group UI Semi Bold" pitchFamily="34" charset="-120"/>
+              </a:rPr>
+            </a:br>
+            <a:r>
+              <a:rPr lang="ru-RU" sz="3400">
+                <a:solidFill>
+                  <a:srgbClr val="0B1733"/>
+                </a:solidFill>
+                <a:latin typeface="VTB Group UI Book" panose="020B0503040504020204" pitchFamily="34" charset="-52"/>
+                <a:ea typeface="VTB Group UI Semi Bold" pitchFamily="34" charset="-122"/>
+                <a:cs typeface="VTB Group UI Semi Bold" pitchFamily="34" charset="-120"/>
+              </a:rPr>
+              <a:t>Выбор комнаты конференции в зависимости от ИС, на которой произошел </a:t>
+            </a:r>
+            <a:r>
+              <a:rPr lang="en-US" sz="3400">
+                <a:solidFill>
+                  <a:srgbClr val="0B1733"/>
+                </a:solidFill>
+                <a:latin typeface="VTB Group UI Book" panose="020B0503040504020204" pitchFamily="34" charset="-52"/>
+                <a:ea typeface="VTB Group UI Semi Bold" pitchFamily="34" charset="-122"/>
+                <a:cs typeface="VTB Group UI Semi Bold" pitchFamily="34" charset="-120"/>
+              </a:rPr>
+              <a:t>INC</a:t>
+            </a:r>
+          </a:p>
+          <a:p>
+            <a:pPr marL="0" indent="0">
+              <a:buNone/>
+            </a:pPr>
+            <a:endParaRPr lang="en-US" sz="3400">
+              <a:solidFill>
+                <a:srgbClr val="0B1733"/>
+              </a:solidFill>
+              <a:latin typeface="VTB Group UI Book" panose="020B0503040504020204" pitchFamily="34" charset="-52"/>
+              <a:ea typeface="VTB Group UI Semi Bold" pitchFamily="34" charset="-122"/>
+              <a:cs typeface="VTB Group UI Semi Bold" pitchFamily="34" charset="-120"/>
+            </a:endParaRPr>
+          </a:p>
+          <a:p>
+            <a:pPr marL="0" indent="0">
+              <a:buNone/>
+            </a:pPr>
+            <a:r>
+              <a:rPr lang="ru-RU" sz="3400">
+                <a:solidFill>
+                  <a:srgbClr val="0B1733"/>
+                </a:solidFill>
+                <a:latin typeface="VTB Group UI Book" panose="020B0503040504020204" pitchFamily="34" charset="-52"/>
+                <a:ea typeface="VTB Group UI Semi Bold" pitchFamily="34" charset="-122"/>
+                <a:cs typeface="VTB Group UI Semi Bold" pitchFamily="34" charset="-120"/>
+              </a:rPr>
+              <a:t>Создание Доски – опция Дежурного.</a:t>
+            </a:r>
+          </a:p>
+          <a:p>
+            <a:pPr marL="0" indent="0">
+              <a:buNone/>
+            </a:pPr>
+            <a:endParaRPr lang="ru-RU" sz="3400">
+              <a:solidFill>
+                <a:srgbClr val="0B1733"/>
+              </a:solidFill>
+              <a:latin typeface="VTB Group UI Book" panose="020B0503040504020204" pitchFamily="34" charset="-52"/>
+              <a:ea typeface="VTB Group UI Semi Bold" pitchFamily="34" charset="-122"/>
+              <a:cs typeface="VTB Group UI Semi Bold" pitchFamily="34" charset="-120"/>
+            </a:endParaRPr>
+          </a:p>
+          <a:p>
+            <a:pPr marL="0" indent="0">
+              <a:buNone/>
+            </a:pPr>
+            <a:r>
+              <a:rPr lang="ru-RU" sz="3400">
+                <a:solidFill>
+                  <a:srgbClr val="0B1733"/>
+                </a:solidFill>
+                <a:latin typeface="VTB Group UI Book" panose="020B0503040504020204" pitchFamily="34" charset="-52"/>
+                <a:ea typeface="VTB Group UI Semi Bold" pitchFamily="34" charset="-122"/>
+                <a:cs typeface="VTB Group UI Semi Bold" pitchFamily="34" charset="-120"/>
+              </a:rPr>
+              <a:t>Среднее кол-во активных аварийных КС</a:t>
+            </a:r>
+            <a:r>
+              <a:rPr lang="en-US" sz="3400">
+                <a:solidFill>
+                  <a:srgbClr val="0B1733"/>
+                </a:solidFill>
+                <a:latin typeface="VTB Group UI Book" panose="020B0503040504020204" pitchFamily="34" charset="-52"/>
+                <a:ea typeface="VTB Group UI Semi Bold" pitchFamily="34" charset="-122"/>
+                <a:cs typeface="VTB Group UI Semi Bold" pitchFamily="34" charset="-120"/>
+              </a:rPr>
+              <a:t>: </a:t>
+            </a:r>
+            <a:r>
+              <a:rPr lang="en-US" sz="3400">
+                <a:solidFill>
+                  <a:srgbClr val="0B1733"/>
+                </a:solidFill>
+                <a:highlight>
+                  <a:srgbClr val="FFFF00"/>
+                </a:highlight>
+                <a:latin typeface="VTB Group UI Book" panose="020B0503040504020204" pitchFamily="34" charset="-52"/>
+                <a:ea typeface="VTB Group UI Semi Bold" pitchFamily="34" charset="-122"/>
+                <a:cs typeface="VTB Group UI Semi Bold" pitchFamily="34" charset="-120"/>
+              </a:rPr>
+              <a:t>X</a:t>
+            </a:r>
+            <a:br>
+              <a:rPr lang="en-US" sz="3400">
+                <a:solidFill>
+                  <a:srgbClr val="0B1733"/>
+                </a:solidFill>
+                <a:latin typeface="VTB Group UI Book" panose="020B0503040504020204" pitchFamily="34" charset="-52"/>
+                <a:ea typeface="VTB Group UI Semi Bold" pitchFamily="34" charset="-122"/>
+                <a:cs typeface="VTB Group UI Semi Bold" pitchFamily="34" charset="-120"/>
+              </a:rPr>
+            </a:br>
+            <a:r>
+              <a:rPr lang="ru-RU" sz="3400">
+                <a:solidFill>
+                  <a:srgbClr val="0B1733"/>
+                </a:solidFill>
+                <a:latin typeface="VTB Group UI Book" panose="020B0503040504020204" pitchFamily="34" charset="-52"/>
+                <a:ea typeface="VTB Group UI Semi Bold" pitchFamily="34" charset="-122"/>
+                <a:cs typeface="VTB Group UI Semi Bold" pitchFamily="34" charset="-120"/>
+              </a:rPr>
+              <a:t>На 11</a:t>
+            </a:r>
+            <a:r>
+              <a:rPr lang="en-US" sz="3400">
+                <a:solidFill>
+                  <a:srgbClr val="0B1733"/>
+                </a:solidFill>
+                <a:latin typeface="VTB Group UI Book" panose="020B0503040504020204" pitchFamily="34" charset="-52"/>
+                <a:ea typeface="VTB Group UI Semi Bold" pitchFamily="34" charset="-122"/>
+                <a:cs typeface="VTB Group UI Semi Bold" pitchFamily="34" charset="-120"/>
+              </a:rPr>
+              <a:t>:45 26.10 - 24</a:t>
+            </a:r>
+            <a:br>
+              <a:rPr lang="ru-RU" sz="3400">
+                <a:solidFill>
+                  <a:srgbClr val="0B1733"/>
+                </a:solidFill>
+                <a:latin typeface="VTB Group UI Book" panose="020B0503040504020204" pitchFamily="34" charset="-52"/>
+                <a:ea typeface="VTB Group UI Semi Bold" pitchFamily="34" charset="-122"/>
+                <a:cs typeface="VTB Group UI Semi Bold" pitchFamily="34" charset="-120"/>
+              </a:rPr>
+            </a:br>
+            <a:endParaRPr lang="ru-RU" sz="3400">
+              <a:solidFill>
+                <a:srgbClr val="0B1733"/>
+              </a:solidFill>
+              <a:latin typeface="VTB Group UI Book" panose="020B0503040504020204" pitchFamily="34" charset="-52"/>
+              <a:ea typeface="VTB Group UI Semi Bold" pitchFamily="34" charset="-122"/>
+              <a:cs typeface="VTB Group UI Semi Bold" pitchFamily="34" charset="-120"/>
+            </a:endParaRPr>
+          </a:p>
+          <a:p>
+            <a:pPr marL="0" indent="0">
+              <a:buNone/>
+            </a:pPr>
+            <a:r>
+              <a:rPr lang="ru-RU" sz="3400">
+                <a:solidFill>
+                  <a:srgbClr val="0B1733"/>
+                </a:solidFill>
+                <a:latin typeface="VTB Group UI Book" panose="020B0503040504020204" pitchFamily="34" charset="-52"/>
+                <a:ea typeface="VTB Group UI Semi Bold" pitchFamily="34" charset="-122"/>
+                <a:cs typeface="VTB Group UI Semi Bold" pitchFamily="34" charset="-120"/>
+              </a:rPr>
+              <a:t>	</a:t>
+            </a:r>
+            <a:endParaRPr lang="ru-RU" sz="3400">
+              <a:solidFill>
+                <a:srgbClr val="0B1733"/>
+              </a:solidFill>
+              <a:latin typeface="VTB Group UI Book" panose="020B0503040504020204" pitchFamily="34" charset="-52"/>
+            </a:endParaRPr>
+          </a:p>
+          <a:p>
+            <a:pPr marL="0" indent="0">
+              <a:buNone/>
+            </a:pPr>
+            <a:endParaRPr lang="en-US" sz="3400" dirty="0">
+              <a:latin typeface="VTB Group UI Book" panose="020B0503040504020204" pitchFamily="34" charset="-52"/>
+            </a:endParaRPr>
           </a:p>
         </p:txBody>
       </p:sp>
       <p:pic>
         <p:nvPicPr>
-          <p:cNvPr id="5" name="Image 0" descr="/tmp/claude-0/-home-claude/3e2c67bf-185e-57a7-b169-f73d7abaeeba/scratchpad/flow/deck2/holst.png"/>
+          <p:cNvPr id="19" name="3" descr="preencoded.png">
+            <a:extLst>
+              <a:ext uri="{FF2B5EF4-FFF2-40B4-BE49-F238E27FC236}">
+                <a16:creationId xmlns:a16="http://schemas.microsoft.com/office/drawing/2014/main" id="{2FB6F499-9CEE-D1D6-79A2-37EA6DF17D50}"/>
+              </a:ext>
+            </a:extLst>
+          </p:cNvPr>
           <p:cNvPicPr>
             <a:picLocks noChangeAspect="1"/>
           </p:cNvPicPr>
@@ -10157,14 +10168,15 @@
         </p:nvPicPr>
         <p:blipFill>
           <a:blip r:embed="rId3"/>
+          <a:srcRect r="88149" b="61089"/>
           <a:stretch>
             <a:fillRect/>
           </a:stretch>
         </p:blipFill>
         <p:spPr>
           <a:xfrm>
-            <a:off x="0" y="0"/>
-            <a:ext cx="12192000" cy="5568950"/>
+            <a:off x="534296" y="533352"/>
+            <a:ext cx="950413" cy="707886"/>
           </a:xfrm>
           <a:prstGeom prst="rect">
             <a:avLst/>
@@ -10173,58 +10185,101 @@
       </p:pic>
       <p:sp>
         <p:nvSpPr>
-          <p:cNvPr id="4" name="TextBox 3">
+          <p:cNvPr id="21" name="default_name">
             <a:extLst>
               <a:ext uri="{FF2B5EF4-FFF2-40B4-BE49-F238E27FC236}">
-                <a16:creationId xmlns:a16="http://schemas.microsoft.com/office/drawing/2014/main" id="{F740E426-526A-F00C-6B71-8372EEB4D5EA}"/>
+                <a16:creationId xmlns:a16="http://schemas.microsoft.com/office/drawing/2014/main" id="{C70EB922-B665-0186-F5C3-665B79D9085D}"/>
               </a:ext>
             </a:extLst>
           </p:cNvPr>
-          <p:cNvSpPr txBox="1"/>
+          <p:cNvSpPr/>
           <p:nvPr/>
         </p:nvSpPr>
         <p:spPr>
           <a:xfrm>
-            <a:off x="1" y="5529559"/>
-            <a:ext cx="12191999" cy="1323439"/>
+            <a:off x="690998" y="686211"/>
+            <a:ext cx="447675" cy="304800"/>
           </a:xfrm>
           <a:prstGeom prst="rect">
             <a:avLst/>
           </a:prstGeom>
           <a:noFill/>
+          <a:ln/>
         </p:spPr>
         <p:txBody>
-          <a:bodyPr wrap="square">
-            <a:spAutoFit/>
-          </a:bodyPr>
+          <a:bodyPr wrap="square" lIns="0" tIns="0" rIns="0" bIns="0" rtlCol="0" anchor="t"/>
           <a:lstStyle/>
           <a:p>
             <a:pPr marL="0" indent="0" algn="ctr">
+              <a:lnSpc>
+                <a:spcPct val="83333"/>
+              </a:lnSpc>
+              <a:spcAft>
+                <a:spcPts val="1800"/>
+              </a:spcAft>
               <a:buNone/>
             </a:pPr>
             <a:r>
-              <a:rPr lang="ru-RU" sz="8000">
-                <a:solidFill>
-                  <a:srgbClr val="0B1733"/>
-                </a:solidFill>
-                <a:latin typeface="VTB Group UI Semi Bold" pitchFamily="34" charset="0"/>
-              </a:rPr>
-              <a:t>Аналог</a:t>
-            </a:r>
-            <a:r>
-              <a:rPr lang="en-US" sz="8000">
-                <a:solidFill>
-                  <a:srgbClr val="0B1733"/>
-                </a:solidFill>
-                <a:latin typeface="VTB Group UI Semi Bold" pitchFamily="34" charset="0"/>
-              </a:rPr>
-              <a:t>#1 Holst</a:t>
-            </a:r>
-            <a:endParaRPr lang="en-US" sz="8000" dirty="0"/>
+              <a:rPr lang="ru-RU" sz="2400" b="1" kern="0" spc="-150">
+                <a:solidFill>
+                  <a:srgbClr val="FFFFFF"/>
+                </a:solidFill>
+                <a:latin typeface="Styrene A Bold" pitchFamily="34" charset="0"/>
+                <a:ea typeface="Styrene A Bold" pitchFamily="34" charset="-122"/>
+                <a:cs typeface="Styrene A Bold" pitchFamily="34" charset="-120"/>
+              </a:rPr>
+              <a:t>06</a:t>
+            </a:r>
+            <a:endParaRPr lang="en-US" sz="2400"/>
           </a:p>
         </p:txBody>
       </p:sp>
+      <p:sp>
+        <p:nvSpPr>
+          <p:cNvPr id="44" name="default_name">
+            <a:extLst>
+              <a:ext uri="{FF2B5EF4-FFF2-40B4-BE49-F238E27FC236}">
+                <a16:creationId xmlns:a16="http://schemas.microsoft.com/office/drawing/2014/main" id="{CF7BA98C-B137-BFEA-6835-6C44015B938E}"/>
+              </a:ext>
+            </a:extLst>
+          </p:cNvPr>
+          <p:cNvSpPr/>
+          <p:nvPr/>
+        </p:nvSpPr>
+        <p:spPr>
+          <a:xfrm>
+            <a:off x="690998" y="4259420"/>
+            <a:ext cx="447675" cy="304800"/>
+          </a:xfrm>
+          <a:prstGeom prst="rect">
+            <a:avLst/>
+          </a:prstGeom>
+          <a:noFill/>
+          <a:ln/>
+        </p:spPr>
+        <p:txBody>
+          <a:bodyPr wrap="square" lIns="0" tIns="0" rIns="0" bIns="0" rtlCol="0" anchor="t"/>
+          <a:lstStyle/>
+          <a:p>
+            <a:pPr marL="0" indent="0" algn="ctr">
+              <a:lnSpc>
+                <a:spcPct val="83333"/>
+              </a:lnSpc>
+              <a:spcAft>
+                <a:spcPts val="1800"/>
+              </a:spcAft>
+              <a:buNone/>
+            </a:pPr>
+            <a:endParaRPr lang="en-US" sz="2400"/>
+          </a:p>
+        </p:txBody>
+      </p:sp>
     </p:spTree>
+    <p:extLst>
+      <p:ext uri="{BB962C8B-B14F-4D97-AF65-F5344CB8AC3E}">
+        <p14:creationId xmlns:p14="http://schemas.microsoft.com/office/powerpoint/2010/main" val="1543548569"/>
+      </p:ext>
+    </p:extLst>
   </p:cSld>
   <p:clrMapOvr>
     <a:masterClrMapping/>
